--- a/我有喜樂(崇拜版).pptx
+++ b/我有喜樂(崇拜版).pptx
@@ -5,16 +5,21 @@
     <p:sldMasterId id="2147483660" r:id="rId1"/>
   </p:sldMasterIdLst>
   <p:sldIdLst>
-    <p:sldId id="256" r:id="rId2"/>
-    <p:sldId id="257" r:id="rId3"/>
-    <p:sldId id="258" r:id="rId4"/>
-    <p:sldId id="259" r:id="rId5"/>
-    <p:sldId id="260" r:id="rId6"/>
-    <p:sldId id="261" r:id="rId7"/>
-    <p:sldId id="262" r:id="rId8"/>
-    <p:sldId id="263" r:id="rId9"/>
+    <p:sldId id="353" r:id="rId2"/>
+    <p:sldId id="390" r:id="rId3"/>
+    <p:sldId id="633" r:id="rId4"/>
+    <p:sldId id="634" r:id="rId5"/>
+    <p:sldId id="635" r:id="rId6"/>
+    <p:sldId id="636" r:id="rId7"/>
+    <p:sldId id="637" r:id="rId8"/>
+    <p:sldId id="638" r:id="rId9"/>
+    <p:sldId id="639" r:id="rId10"/>
+    <p:sldId id="640" r:id="rId11"/>
+    <p:sldId id="641" r:id="rId12"/>
+    <p:sldId id="642" r:id="rId13"/>
+    <p:sldId id="643" r:id="rId14"/>
   </p:sldIdLst>
-  <p:sldSz cx="9144000" cy="6858000" type="screen4x3"/>
+  <p:sldSz cx="12192000" cy="6858000"/>
   <p:notesSz cx="6858000" cy="9144000"/>
   <p:defaultTextStyle>
     <a:defPPr>
@@ -111,6 +116,43 @@
       </a:defRPr>
     </a:lvl9pPr>
   </p:defaultTextStyle>
+  <p:extLst>
+    <p:ext uri="{521415D9-36F7-43E2-AB2F-B90AF26B5E84}">
+      <p14:sectionLst xmlns:p14="http://schemas.microsoft.com/office/powerpoint/2010/main">
+        <p14:section name="我有喜樂" id="{46C89C24-1424-4537-ADA9-8D6916FAD19C}">
+          <p14:sldIdLst>
+            <p14:sldId id="353"/>
+            <p14:sldId id="390"/>
+            <p14:sldId id="633"/>
+            <p14:sldId id="634"/>
+            <p14:sldId id="635"/>
+            <p14:sldId id="636"/>
+            <p14:sldId id="637"/>
+            <p14:sldId id="638"/>
+            <p14:sldId id="639"/>
+            <p14:sldId id="640"/>
+            <p14:sldId id="641"/>
+            <p14:sldId id="642"/>
+            <p14:sldId id="643"/>
+          </p14:sldIdLst>
+        </p14:section>
+      </p14:sectionLst>
+    </p:ext>
+    <p:ext uri="{EFAFB233-063F-42B5-8137-9DF3F51BA10A}">
+      <p15:sldGuideLst xmlns:p15="http://schemas.microsoft.com/office/powerpoint/2012/main">
+        <p15:guide id="1" orient="horz" pos="2160" userDrawn="1">
+          <p15:clr>
+            <a:srgbClr val="A4A3A4"/>
+          </p15:clr>
+        </p15:guide>
+        <p15:guide id="2" pos="3840" userDrawn="1">
+          <p15:clr>
+            <a:srgbClr val="A4A3A4"/>
+          </p15:clr>
+        </p15:guide>
+      </p15:sldGuideLst>
+    </p:ext>
+  </p:extLst>
 </p:presentation>
 </file>
 
@@ -143,8 +185,8 @@
         </p:nvSpPr>
         <p:spPr>
           <a:xfrm>
-            <a:off x="685800" y="2130425"/>
-            <a:ext cx="7772400" cy="1470025"/>
+            <a:off x="914400" y="2130426"/>
+            <a:ext cx="10363200" cy="1470025"/>
           </a:xfrm>
         </p:spPr>
         <p:txBody>
@@ -152,10 +194,9 @@
           <a:lstStyle/>
           <a:p>
             <a:r>
-              <a:rPr lang="zh-TW" altLang="en-US" smtClean="0"/>
+              <a:rPr lang="zh-TW" altLang="en-US"/>
               <a:t>按一下以編輯母片標題樣式</a:t>
             </a:r>
-            <a:endParaRPr lang="zh-TW" altLang="en-US"/>
           </a:p>
         </p:txBody>
       </p:sp>
@@ -171,8 +212,8 @@
         </p:nvSpPr>
         <p:spPr>
           <a:xfrm>
-            <a:off x="1371600" y="3886200"/>
-            <a:ext cx="6400800" cy="1752600"/>
+            <a:off x="1828800" y="3886200"/>
+            <a:ext cx="8534400" cy="1752600"/>
           </a:xfrm>
         </p:spPr>
         <p:txBody>
@@ -271,10 +312,9 @@
           </a:lstStyle>
           <a:p>
             <a:r>
-              <a:rPr lang="zh-TW" altLang="en-US" smtClean="0"/>
+              <a:rPr lang="zh-TW" altLang="en-US"/>
               <a:t>按一下以編輯母片副標題樣式</a:t>
             </a:r>
-            <a:endParaRPr lang="zh-TW" altLang="en-US"/>
           </a:p>
         </p:txBody>
       </p:sp>
@@ -295,7 +335,7 @@
           <a:p>
             <a:fld id="{15583AF3-A962-4DB7-B241-BE1DA4E52681}" type="datetimeFigureOut">
               <a:rPr lang="zh-TW" altLang="en-US" smtClean="0"/>
-              <a:t>2018/11/17</a:t>
+              <a:t>2024/12/7</a:t>
             </a:fld>
             <a:endParaRPr lang="zh-TW" altLang="en-US"/>
           </a:p>
@@ -384,10 +424,9 @@
           <a:lstStyle/>
           <a:p>
             <a:r>
-              <a:rPr lang="zh-TW" altLang="en-US" smtClean="0"/>
+              <a:rPr lang="zh-TW" altLang="en-US"/>
               <a:t>按一下以編輯母片標題樣式</a:t>
             </a:r>
-            <a:endParaRPr lang="zh-TW" altLang="en-US"/>
           </a:p>
         </p:txBody>
       </p:sp>
@@ -408,38 +447,37 @@
           <a:p>
             <a:pPr lvl="0"/>
             <a:r>
-              <a:rPr lang="zh-TW" altLang="en-US" smtClean="0"/>
+              <a:rPr lang="zh-TW" altLang="en-US"/>
               <a:t>按一下以編輯母片文字樣式</a:t>
             </a:r>
           </a:p>
           <a:p>
             <a:pPr lvl="1"/>
             <a:r>
-              <a:rPr lang="zh-TW" altLang="en-US" smtClean="0"/>
+              <a:rPr lang="zh-TW" altLang="en-US"/>
               <a:t>第二層</a:t>
             </a:r>
           </a:p>
           <a:p>
             <a:pPr lvl="2"/>
             <a:r>
-              <a:rPr lang="zh-TW" altLang="en-US" smtClean="0"/>
+              <a:rPr lang="zh-TW" altLang="en-US"/>
               <a:t>第三層</a:t>
             </a:r>
           </a:p>
           <a:p>
             <a:pPr lvl="3"/>
             <a:r>
-              <a:rPr lang="zh-TW" altLang="en-US" smtClean="0"/>
+              <a:rPr lang="zh-TW" altLang="en-US"/>
               <a:t>第四層</a:t>
             </a:r>
           </a:p>
           <a:p>
             <a:pPr lvl="4"/>
             <a:r>
-              <a:rPr lang="zh-TW" altLang="en-US" smtClean="0"/>
+              <a:rPr lang="zh-TW" altLang="en-US"/>
               <a:t>第五層</a:t>
             </a:r>
-            <a:endParaRPr lang="zh-TW" altLang="en-US"/>
           </a:p>
         </p:txBody>
       </p:sp>
@@ -460,7 +498,7 @@
           <a:p>
             <a:fld id="{15583AF3-A962-4DB7-B241-BE1DA4E52681}" type="datetimeFigureOut">
               <a:rPr lang="zh-TW" altLang="en-US" smtClean="0"/>
-              <a:t>2018/11/17</a:t>
+              <a:t>2024/12/7</a:t>
             </a:fld>
             <a:endParaRPr lang="zh-TW" altLang="en-US"/>
           </a:p>
@@ -545,8 +583,8 @@
         </p:nvSpPr>
         <p:spPr>
           <a:xfrm>
-            <a:off x="6629400" y="274638"/>
-            <a:ext cx="2057400" cy="5851525"/>
+            <a:off x="8839200" y="274639"/>
+            <a:ext cx="2743200" cy="5851525"/>
           </a:xfrm>
         </p:spPr>
         <p:txBody>
@@ -554,10 +592,9 @@
           <a:lstStyle/>
           <a:p>
             <a:r>
-              <a:rPr lang="zh-TW" altLang="en-US" smtClean="0"/>
+              <a:rPr lang="zh-TW" altLang="en-US"/>
               <a:t>按一下以編輯母片標題樣式</a:t>
             </a:r>
-            <a:endParaRPr lang="zh-TW" altLang="en-US"/>
           </a:p>
         </p:txBody>
       </p:sp>
@@ -573,8 +610,8 @@
         </p:nvSpPr>
         <p:spPr>
           <a:xfrm>
-            <a:off x="457200" y="274638"/>
-            <a:ext cx="6019800" cy="5851525"/>
+            <a:off x="609600" y="274639"/>
+            <a:ext cx="8026400" cy="5851525"/>
           </a:xfrm>
         </p:spPr>
         <p:txBody>
@@ -583,38 +620,37 @@
           <a:p>
             <a:pPr lvl="0"/>
             <a:r>
-              <a:rPr lang="zh-TW" altLang="en-US" smtClean="0"/>
+              <a:rPr lang="zh-TW" altLang="en-US"/>
               <a:t>按一下以編輯母片文字樣式</a:t>
             </a:r>
           </a:p>
           <a:p>
             <a:pPr lvl="1"/>
             <a:r>
-              <a:rPr lang="zh-TW" altLang="en-US" smtClean="0"/>
+              <a:rPr lang="zh-TW" altLang="en-US"/>
               <a:t>第二層</a:t>
             </a:r>
           </a:p>
           <a:p>
             <a:pPr lvl="2"/>
             <a:r>
-              <a:rPr lang="zh-TW" altLang="en-US" smtClean="0"/>
+              <a:rPr lang="zh-TW" altLang="en-US"/>
               <a:t>第三層</a:t>
             </a:r>
           </a:p>
           <a:p>
             <a:pPr lvl="3"/>
             <a:r>
-              <a:rPr lang="zh-TW" altLang="en-US" smtClean="0"/>
+              <a:rPr lang="zh-TW" altLang="en-US"/>
               <a:t>第四層</a:t>
             </a:r>
           </a:p>
           <a:p>
             <a:pPr lvl="4"/>
             <a:r>
-              <a:rPr lang="zh-TW" altLang="en-US" smtClean="0"/>
+              <a:rPr lang="zh-TW" altLang="en-US"/>
               <a:t>第五層</a:t>
             </a:r>
-            <a:endParaRPr lang="zh-TW" altLang="en-US"/>
           </a:p>
         </p:txBody>
       </p:sp>
@@ -635,7 +671,7 @@
           <a:p>
             <a:fld id="{15583AF3-A962-4DB7-B241-BE1DA4E52681}" type="datetimeFigureOut">
               <a:rPr lang="zh-TW" altLang="en-US" smtClean="0"/>
-              <a:t>2018/11/17</a:t>
+              <a:t>2024/12/7</a:t>
             </a:fld>
             <a:endParaRPr lang="zh-TW" altLang="en-US"/>
           </a:p>
@@ -724,10 +760,9 @@
           <a:lstStyle/>
           <a:p>
             <a:r>
-              <a:rPr lang="zh-TW" altLang="en-US" smtClean="0"/>
+              <a:rPr lang="zh-TW" altLang="en-US"/>
               <a:t>按一下以編輯母片標題樣式</a:t>
             </a:r>
-            <a:endParaRPr lang="zh-TW" altLang="en-US"/>
           </a:p>
         </p:txBody>
       </p:sp>
@@ -748,38 +783,37 @@
           <a:p>
             <a:pPr lvl="0"/>
             <a:r>
-              <a:rPr lang="zh-TW" altLang="en-US" smtClean="0"/>
+              <a:rPr lang="zh-TW" altLang="en-US"/>
               <a:t>按一下以編輯母片文字樣式</a:t>
             </a:r>
           </a:p>
           <a:p>
             <a:pPr lvl="1"/>
             <a:r>
-              <a:rPr lang="zh-TW" altLang="en-US" smtClean="0"/>
+              <a:rPr lang="zh-TW" altLang="en-US"/>
               <a:t>第二層</a:t>
             </a:r>
           </a:p>
           <a:p>
             <a:pPr lvl="2"/>
             <a:r>
-              <a:rPr lang="zh-TW" altLang="en-US" smtClean="0"/>
+              <a:rPr lang="zh-TW" altLang="en-US"/>
               <a:t>第三層</a:t>
             </a:r>
           </a:p>
           <a:p>
             <a:pPr lvl="3"/>
             <a:r>
-              <a:rPr lang="zh-TW" altLang="en-US" smtClean="0"/>
+              <a:rPr lang="zh-TW" altLang="en-US"/>
               <a:t>第四層</a:t>
             </a:r>
           </a:p>
           <a:p>
             <a:pPr lvl="4"/>
             <a:r>
-              <a:rPr lang="zh-TW" altLang="en-US" smtClean="0"/>
+              <a:rPr lang="zh-TW" altLang="en-US"/>
               <a:t>第五層</a:t>
             </a:r>
-            <a:endParaRPr lang="zh-TW" altLang="en-US"/>
           </a:p>
         </p:txBody>
       </p:sp>
@@ -800,7 +834,7 @@
           <a:p>
             <a:fld id="{15583AF3-A962-4DB7-B241-BE1DA4E52681}" type="datetimeFigureOut">
               <a:rPr lang="zh-TW" altLang="en-US" smtClean="0"/>
-              <a:t>2018/11/17</a:t>
+              <a:t>2024/12/7</a:t>
             </a:fld>
             <a:endParaRPr lang="zh-TW" altLang="en-US"/>
           </a:p>
@@ -885,8 +919,8 @@
         </p:nvSpPr>
         <p:spPr>
           <a:xfrm>
-            <a:off x="722313" y="4406900"/>
-            <a:ext cx="7772400" cy="1362075"/>
+            <a:off x="963084" y="4406901"/>
+            <a:ext cx="10363200" cy="1362075"/>
           </a:xfrm>
         </p:spPr>
         <p:txBody>
@@ -898,10 +932,9 @@
           </a:lstStyle>
           <a:p>
             <a:r>
-              <a:rPr lang="zh-TW" altLang="en-US" smtClean="0"/>
+              <a:rPr lang="zh-TW" altLang="en-US"/>
               <a:t>按一下以編輯母片標題樣式</a:t>
             </a:r>
-            <a:endParaRPr lang="zh-TW" altLang="en-US"/>
           </a:p>
         </p:txBody>
       </p:sp>
@@ -917,8 +950,8 @@
         </p:nvSpPr>
         <p:spPr>
           <a:xfrm>
-            <a:off x="722313" y="2906713"/>
-            <a:ext cx="7772400" cy="1500187"/>
+            <a:off x="963084" y="2906713"/>
+            <a:ext cx="10363200" cy="1500187"/>
           </a:xfrm>
         </p:spPr>
         <p:txBody>
@@ -1018,7 +1051,7 @@
           <a:p>
             <a:pPr lvl="0"/>
             <a:r>
-              <a:rPr lang="zh-TW" altLang="en-US" smtClean="0"/>
+              <a:rPr lang="zh-TW" altLang="en-US"/>
               <a:t>按一下以編輯母片文字樣式</a:t>
             </a:r>
           </a:p>
@@ -1041,7 +1074,7 @@
           <a:p>
             <a:fld id="{15583AF3-A962-4DB7-B241-BE1DA4E52681}" type="datetimeFigureOut">
               <a:rPr lang="zh-TW" altLang="en-US" smtClean="0"/>
-              <a:t>2018/11/17</a:t>
+              <a:t>2024/12/7</a:t>
             </a:fld>
             <a:endParaRPr lang="zh-TW" altLang="en-US"/>
           </a:p>
@@ -1130,10 +1163,9 @@
           <a:lstStyle/>
           <a:p>
             <a:r>
-              <a:rPr lang="zh-TW" altLang="en-US" smtClean="0"/>
+              <a:rPr lang="zh-TW" altLang="en-US"/>
               <a:t>按一下以編輯母片標題樣式</a:t>
             </a:r>
-            <a:endParaRPr lang="zh-TW" altLang="en-US"/>
           </a:p>
         </p:txBody>
       </p:sp>
@@ -1149,8 +1181,8 @@
         </p:nvSpPr>
         <p:spPr>
           <a:xfrm>
-            <a:off x="457200" y="1600200"/>
-            <a:ext cx="4038600" cy="4525963"/>
+            <a:off x="609600" y="1600201"/>
+            <a:ext cx="5384800" cy="4525963"/>
           </a:xfrm>
         </p:spPr>
         <p:txBody>
@@ -1187,38 +1219,37 @@
           <a:p>
             <a:pPr lvl="0"/>
             <a:r>
-              <a:rPr lang="zh-TW" altLang="en-US" smtClean="0"/>
+              <a:rPr lang="zh-TW" altLang="en-US"/>
               <a:t>按一下以編輯母片文字樣式</a:t>
             </a:r>
           </a:p>
           <a:p>
             <a:pPr lvl="1"/>
             <a:r>
-              <a:rPr lang="zh-TW" altLang="en-US" smtClean="0"/>
+              <a:rPr lang="zh-TW" altLang="en-US"/>
               <a:t>第二層</a:t>
             </a:r>
           </a:p>
           <a:p>
             <a:pPr lvl="2"/>
             <a:r>
-              <a:rPr lang="zh-TW" altLang="en-US" smtClean="0"/>
+              <a:rPr lang="zh-TW" altLang="en-US"/>
               <a:t>第三層</a:t>
             </a:r>
           </a:p>
           <a:p>
             <a:pPr lvl="3"/>
             <a:r>
-              <a:rPr lang="zh-TW" altLang="en-US" smtClean="0"/>
+              <a:rPr lang="zh-TW" altLang="en-US"/>
               <a:t>第四層</a:t>
             </a:r>
           </a:p>
           <a:p>
             <a:pPr lvl="4"/>
             <a:r>
-              <a:rPr lang="zh-TW" altLang="en-US" smtClean="0"/>
+              <a:rPr lang="zh-TW" altLang="en-US"/>
               <a:t>第五層</a:t>
             </a:r>
-            <a:endParaRPr lang="zh-TW" altLang="en-US"/>
           </a:p>
         </p:txBody>
       </p:sp>
@@ -1234,8 +1265,8 @@
         </p:nvSpPr>
         <p:spPr>
           <a:xfrm>
-            <a:off x="4648200" y="1600200"/>
-            <a:ext cx="4038600" cy="4525963"/>
+            <a:off x="6197600" y="1600201"/>
+            <a:ext cx="5384800" cy="4525963"/>
           </a:xfrm>
         </p:spPr>
         <p:txBody>
@@ -1272,38 +1303,37 @@
           <a:p>
             <a:pPr lvl="0"/>
             <a:r>
-              <a:rPr lang="zh-TW" altLang="en-US" smtClean="0"/>
+              <a:rPr lang="zh-TW" altLang="en-US"/>
               <a:t>按一下以編輯母片文字樣式</a:t>
             </a:r>
           </a:p>
           <a:p>
             <a:pPr lvl="1"/>
             <a:r>
-              <a:rPr lang="zh-TW" altLang="en-US" smtClean="0"/>
+              <a:rPr lang="zh-TW" altLang="en-US"/>
               <a:t>第二層</a:t>
             </a:r>
           </a:p>
           <a:p>
             <a:pPr lvl="2"/>
             <a:r>
-              <a:rPr lang="zh-TW" altLang="en-US" smtClean="0"/>
+              <a:rPr lang="zh-TW" altLang="en-US"/>
               <a:t>第三層</a:t>
             </a:r>
           </a:p>
           <a:p>
             <a:pPr lvl="3"/>
             <a:r>
-              <a:rPr lang="zh-TW" altLang="en-US" smtClean="0"/>
+              <a:rPr lang="zh-TW" altLang="en-US"/>
               <a:t>第四層</a:t>
             </a:r>
           </a:p>
           <a:p>
             <a:pPr lvl="4"/>
             <a:r>
-              <a:rPr lang="zh-TW" altLang="en-US" smtClean="0"/>
+              <a:rPr lang="zh-TW" altLang="en-US"/>
               <a:t>第五層</a:t>
             </a:r>
-            <a:endParaRPr lang="zh-TW" altLang="en-US"/>
           </a:p>
         </p:txBody>
       </p:sp>
@@ -1324,7 +1354,7 @@
           <a:p>
             <a:fld id="{15583AF3-A962-4DB7-B241-BE1DA4E52681}" type="datetimeFigureOut">
               <a:rPr lang="zh-TW" altLang="en-US" smtClean="0"/>
-              <a:t>2018/11/17</a:t>
+              <a:t>2024/12/7</a:t>
             </a:fld>
             <a:endParaRPr lang="zh-TW" altLang="en-US"/>
           </a:p>
@@ -1417,10 +1447,9 @@
           </a:lstStyle>
           <a:p>
             <a:r>
-              <a:rPr lang="zh-TW" altLang="en-US" smtClean="0"/>
+              <a:rPr lang="zh-TW" altLang="en-US"/>
               <a:t>按一下以編輯母片標題樣式</a:t>
             </a:r>
-            <a:endParaRPr lang="zh-TW" altLang="en-US"/>
           </a:p>
         </p:txBody>
       </p:sp>
@@ -1436,8 +1465,8 @@
         </p:nvSpPr>
         <p:spPr>
           <a:xfrm>
-            <a:off x="457200" y="1535113"/>
-            <a:ext cx="4040188" cy="639762"/>
+            <a:off x="609600" y="1535113"/>
+            <a:ext cx="5386917" cy="639762"/>
           </a:xfrm>
         </p:spPr>
         <p:txBody>
@@ -1483,7 +1512,7 @@
           <a:p>
             <a:pPr lvl="0"/>
             <a:r>
-              <a:rPr lang="zh-TW" altLang="en-US" smtClean="0"/>
+              <a:rPr lang="zh-TW" altLang="en-US"/>
               <a:t>按一下以編輯母片文字樣式</a:t>
             </a:r>
           </a:p>
@@ -1501,8 +1530,8 @@
         </p:nvSpPr>
         <p:spPr>
           <a:xfrm>
-            <a:off x="457200" y="2174875"/>
-            <a:ext cx="4040188" cy="3951288"/>
+            <a:off x="609600" y="2174875"/>
+            <a:ext cx="5386917" cy="3951288"/>
           </a:xfrm>
         </p:spPr>
         <p:txBody>
@@ -1539,38 +1568,37 @@
           <a:p>
             <a:pPr lvl="0"/>
             <a:r>
-              <a:rPr lang="zh-TW" altLang="en-US" smtClean="0"/>
+              <a:rPr lang="zh-TW" altLang="en-US"/>
               <a:t>按一下以編輯母片文字樣式</a:t>
             </a:r>
           </a:p>
           <a:p>
             <a:pPr lvl="1"/>
             <a:r>
-              <a:rPr lang="zh-TW" altLang="en-US" smtClean="0"/>
+              <a:rPr lang="zh-TW" altLang="en-US"/>
               <a:t>第二層</a:t>
             </a:r>
           </a:p>
           <a:p>
             <a:pPr lvl="2"/>
             <a:r>
-              <a:rPr lang="zh-TW" altLang="en-US" smtClean="0"/>
+              <a:rPr lang="zh-TW" altLang="en-US"/>
               <a:t>第三層</a:t>
             </a:r>
           </a:p>
           <a:p>
             <a:pPr lvl="3"/>
             <a:r>
-              <a:rPr lang="zh-TW" altLang="en-US" smtClean="0"/>
+              <a:rPr lang="zh-TW" altLang="en-US"/>
               <a:t>第四層</a:t>
             </a:r>
           </a:p>
           <a:p>
             <a:pPr lvl="4"/>
             <a:r>
-              <a:rPr lang="zh-TW" altLang="en-US" smtClean="0"/>
+              <a:rPr lang="zh-TW" altLang="en-US"/>
               <a:t>第五層</a:t>
             </a:r>
-            <a:endParaRPr lang="zh-TW" altLang="en-US"/>
           </a:p>
         </p:txBody>
       </p:sp>
@@ -1586,8 +1614,8 @@
         </p:nvSpPr>
         <p:spPr>
           <a:xfrm>
-            <a:off x="4645025" y="1535113"/>
-            <a:ext cx="4041775" cy="639762"/>
+            <a:off x="6193368" y="1535113"/>
+            <a:ext cx="5389033" cy="639762"/>
           </a:xfrm>
         </p:spPr>
         <p:txBody>
@@ -1633,7 +1661,7 @@
           <a:p>
             <a:pPr lvl="0"/>
             <a:r>
-              <a:rPr lang="zh-TW" altLang="en-US" smtClean="0"/>
+              <a:rPr lang="zh-TW" altLang="en-US"/>
               <a:t>按一下以編輯母片文字樣式</a:t>
             </a:r>
           </a:p>
@@ -1651,8 +1679,8 @@
         </p:nvSpPr>
         <p:spPr>
           <a:xfrm>
-            <a:off x="4645025" y="2174875"/>
-            <a:ext cx="4041775" cy="3951288"/>
+            <a:off x="6193368" y="2174875"/>
+            <a:ext cx="5389033" cy="3951288"/>
           </a:xfrm>
         </p:spPr>
         <p:txBody>
@@ -1689,38 +1717,37 @@
           <a:p>
             <a:pPr lvl="0"/>
             <a:r>
-              <a:rPr lang="zh-TW" altLang="en-US" smtClean="0"/>
+              <a:rPr lang="zh-TW" altLang="en-US"/>
               <a:t>按一下以編輯母片文字樣式</a:t>
             </a:r>
           </a:p>
           <a:p>
             <a:pPr lvl="1"/>
             <a:r>
-              <a:rPr lang="zh-TW" altLang="en-US" smtClean="0"/>
+              <a:rPr lang="zh-TW" altLang="en-US"/>
               <a:t>第二層</a:t>
             </a:r>
           </a:p>
           <a:p>
             <a:pPr lvl="2"/>
             <a:r>
-              <a:rPr lang="zh-TW" altLang="en-US" smtClean="0"/>
+              <a:rPr lang="zh-TW" altLang="en-US"/>
               <a:t>第三層</a:t>
             </a:r>
           </a:p>
           <a:p>
             <a:pPr lvl="3"/>
             <a:r>
-              <a:rPr lang="zh-TW" altLang="en-US" smtClean="0"/>
+              <a:rPr lang="zh-TW" altLang="en-US"/>
               <a:t>第四層</a:t>
             </a:r>
           </a:p>
           <a:p>
             <a:pPr lvl="4"/>
             <a:r>
-              <a:rPr lang="zh-TW" altLang="en-US" smtClean="0"/>
+              <a:rPr lang="zh-TW" altLang="en-US"/>
               <a:t>第五層</a:t>
             </a:r>
-            <a:endParaRPr lang="zh-TW" altLang="en-US"/>
           </a:p>
         </p:txBody>
       </p:sp>
@@ -1741,7 +1768,7 @@
           <a:p>
             <a:fld id="{15583AF3-A962-4DB7-B241-BE1DA4E52681}" type="datetimeFigureOut">
               <a:rPr lang="zh-TW" altLang="en-US" smtClean="0"/>
-              <a:t>2018/11/17</a:t>
+              <a:t>2024/12/7</a:t>
             </a:fld>
             <a:endParaRPr lang="zh-TW" altLang="en-US"/>
           </a:p>
@@ -1830,10 +1857,9 @@
           <a:lstStyle/>
           <a:p>
             <a:r>
-              <a:rPr lang="zh-TW" altLang="en-US" smtClean="0"/>
+              <a:rPr lang="zh-TW" altLang="en-US"/>
               <a:t>按一下以編輯母片標題樣式</a:t>
             </a:r>
-            <a:endParaRPr lang="zh-TW" altLang="en-US"/>
           </a:p>
         </p:txBody>
       </p:sp>
@@ -1854,7 +1880,7 @@
           <a:p>
             <a:fld id="{15583AF3-A962-4DB7-B241-BE1DA4E52681}" type="datetimeFigureOut">
               <a:rPr lang="zh-TW" altLang="en-US" smtClean="0"/>
-              <a:t>2018/11/17</a:t>
+              <a:t>2024/12/7</a:t>
             </a:fld>
             <a:endParaRPr lang="zh-TW" altLang="en-US"/>
           </a:p>
@@ -1944,7 +1970,7 @@
           <a:p>
             <a:fld id="{15583AF3-A962-4DB7-B241-BE1DA4E52681}" type="datetimeFigureOut">
               <a:rPr lang="zh-TW" altLang="en-US" smtClean="0"/>
-              <a:t>2018/11/17</a:t>
+              <a:t>2024/12/7</a:t>
             </a:fld>
             <a:endParaRPr lang="zh-TW" altLang="en-US"/>
           </a:p>
@@ -2029,8 +2055,8 @@
         </p:nvSpPr>
         <p:spPr>
           <a:xfrm>
-            <a:off x="457200" y="273050"/>
-            <a:ext cx="3008313" cy="1162050"/>
+            <a:off x="609601" y="273050"/>
+            <a:ext cx="4011084" cy="1162050"/>
           </a:xfrm>
         </p:spPr>
         <p:txBody>
@@ -2042,10 +2068,9 @@
           </a:lstStyle>
           <a:p>
             <a:r>
-              <a:rPr lang="zh-TW" altLang="en-US" smtClean="0"/>
+              <a:rPr lang="zh-TW" altLang="en-US"/>
               <a:t>按一下以編輯母片標題樣式</a:t>
             </a:r>
-            <a:endParaRPr lang="zh-TW" altLang="en-US"/>
           </a:p>
         </p:txBody>
       </p:sp>
@@ -2061,8 +2086,8 @@
         </p:nvSpPr>
         <p:spPr>
           <a:xfrm>
-            <a:off x="3575050" y="273050"/>
-            <a:ext cx="5111750" cy="5853113"/>
+            <a:off x="4766733" y="273051"/>
+            <a:ext cx="6815667" cy="5853113"/>
           </a:xfrm>
         </p:spPr>
         <p:txBody>
@@ -2099,38 +2124,37 @@
           <a:p>
             <a:pPr lvl="0"/>
             <a:r>
-              <a:rPr lang="zh-TW" altLang="en-US" smtClean="0"/>
+              <a:rPr lang="zh-TW" altLang="en-US"/>
               <a:t>按一下以編輯母片文字樣式</a:t>
             </a:r>
           </a:p>
           <a:p>
             <a:pPr lvl="1"/>
             <a:r>
-              <a:rPr lang="zh-TW" altLang="en-US" smtClean="0"/>
+              <a:rPr lang="zh-TW" altLang="en-US"/>
               <a:t>第二層</a:t>
             </a:r>
           </a:p>
           <a:p>
             <a:pPr lvl="2"/>
             <a:r>
-              <a:rPr lang="zh-TW" altLang="en-US" smtClean="0"/>
+              <a:rPr lang="zh-TW" altLang="en-US"/>
               <a:t>第三層</a:t>
             </a:r>
           </a:p>
           <a:p>
             <a:pPr lvl="3"/>
             <a:r>
-              <a:rPr lang="zh-TW" altLang="en-US" smtClean="0"/>
+              <a:rPr lang="zh-TW" altLang="en-US"/>
               <a:t>第四層</a:t>
             </a:r>
           </a:p>
           <a:p>
             <a:pPr lvl="4"/>
             <a:r>
-              <a:rPr lang="zh-TW" altLang="en-US" smtClean="0"/>
+              <a:rPr lang="zh-TW" altLang="en-US"/>
               <a:t>第五層</a:t>
             </a:r>
-            <a:endParaRPr lang="zh-TW" altLang="en-US"/>
           </a:p>
         </p:txBody>
       </p:sp>
@@ -2146,8 +2170,8 @@
         </p:nvSpPr>
         <p:spPr>
           <a:xfrm>
-            <a:off x="457200" y="1435100"/>
-            <a:ext cx="3008313" cy="4691063"/>
+            <a:off x="609601" y="1435101"/>
+            <a:ext cx="4011084" cy="4691063"/>
           </a:xfrm>
         </p:spPr>
         <p:txBody>
@@ -2193,7 +2217,7 @@
           <a:p>
             <a:pPr lvl="0"/>
             <a:r>
-              <a:rPr lang="zh-TW" altLang="en-US" smtClean="0"/>
+              <a:rPr lang="zh-TW" altLang="en-US"/>
               <a:t>按一下以編輯母片文字樣式</a:t>
             </a:r>
           </a:p>
@@ -2216,7 +2240,7 @@
           <a:p>
             <a:fld id="{15583AF3-A962-4DB7-B241-BE1DA4E52681}" type="datetimeFigureOut">
               <a:rPr lang="zh-TW" altLang="en-US" smtClean="0"/>
-              <a:t>2018/11/17</a:t>
+              <a:t>2024/12/7</a:t>
             </a:fld>
             <a:endParaRPr lang="zh-TW" altLang="en-US"/>
           </a:p>
@@ -2301,8 +2325,8 @@
         </p:nvSpPr>
         <p:spPr>
           <a:xfrm>
-            <a:off x="1792288" y="4800600"/>
-            <a:ext cx="5486400" cy="566738"/>
+            <a:off x="2389717" y="4800600"/>
+            <a:ext cx="7315200" cy="566738"/>
           </a:xfrm>
         </p:spPr>
         <p:txBody>
@@ -2314,10 +2338,9 @@
           </a:lstStyle>
           <a:p>
             <a:r>
-              <a:rPr lang="zh-TW" altLang="en-US" smtClean="0"/>
+              <a:rPr lang="zh-TW" altLang="en-US"/>
               <a:t>按一下以編輯母片標題樣式</a:t>
             </a:r>
-            <a:endParaRPr lang="zh-TW" altLang="en-US"/>
           </a:p>
         </p:txBody>
       </p:sp>
@@ -2333,8 +2356,8 @@
         </p:nvSpPr>
         <p:spPr>
           <a:xfrm>
-            <a:off x="1792288" y="612775"/>
-            <a:ext cx="5486400" cy="4114800"/>
+            <a:off x="2389717" y="612775"/>
+            <a:ext cx="7315200" cy="4114800"/>
           </a:xfrm>
         </p:spPr>
         <p:txBody>
@@ -2379,10 +2402,9 @@
           </a:lstStyle>
           <a:p>
             <a:r>
-              <a:rPr lang="zh-TW" altLang="en-US" smtClean="0"/>
+              <a:rPr lang="zh-TW" altLang="en-US"/>
               <a:t>按一下圖示以新增圖片</a:t>
             </a:r>
-            <a:endParaRPr lang="zh-TW" altLang="en-US"/>
           </a:p>
         </p:txBody>
       </p:sp>
@@ -2398,8 +2420,8 @@
         </p:nvSpPr>
         <p:spPr>
           <a:xfrm>
-            <a:off x="1792288" y="5367338"/>
-            <a:ext cx="5486400" cy="804862"/>
+            <a:off x="2389717" y="5367338"/>
+            <a:ext cx="7315200" cy="804862"/>
           </a:xfrm>
         </p:spPr>
         <p:txBody>
@@ -2445,7 +2467,7 @@
           <a:p>
             <a:pPr lvl="0"/>
             <a:r>
-              <a:rPr lang="zh-TW" altLang="en-US" smtClean="0"/>
+              <a:rPr lang="zh-TW" altLang="en-US"/>
               <a:t>按一下以編輯母片文字樣式</a:t>
             </a:r>
           </a:p>
@@ -2468,7 +2490,7 @@
           <a:p>
             <a:fld id="{15583AF3-A962-4DB7-B241-BE1DA4E52681}" type="datetimeFigureOut">
               <a:rPr lang="zh-TW" altLang="en-US" smtClean="0"/>
-              <a:t>2018/11/17</a:t>
+              <a:t>2024/12/7</a:t>
             </a:fld>
             <a:endParaRPr lang="zh-TW" altLang="en-US"/>
           </a:p>
@@ -2563,8 +2585,8 @@
         </p:nvSpPr>
         <p:spPr>
           <a:xfrm>
-            <a:off x="457200" y="274638"/>
-            <a:ext cx="8229600" cy="1143000"/>
+            <a:off x="609600" y="274638"/>
+            <a:ext cx="10972800" cy="1143000"/>
           </a:xfrm>
           <a:prstGeom prst="rect">
             <a:avLst/>
@@ -2577,10 +2599,9 @@
           <a:lstStyle/>
           <a:p>
             <a:r>
-              <a:rPr lang="zh-TW" altLang="en-US" smtClean="0"/>
+              <a:rPr lang="zh-TW" altLang="en-US"/>
               <a:t>按一下以編輯母片標題樣式</a:t>
             </a:r>
-            <a:endParaRPr lang="zh-TW" altLang="en-US"/>
           </a:p>
         </p:txBody>
       </p:sp>
@@ -2596,8 +2617,8 @@
         </p:nvSpPr>
         <p:spPr>
           <a:xfrm>
-            <a:off x="457200" y="1600200"/>
-            <a:ext cx="8229600" cy="4525963"/>
+            <a:off x="609600" y="1600201"/>
+            <a:ext cx="10972800" cy="4525963"/>
           </a:xfrm>
           <a:prstGeom prst="rect">
             <a:avLst/>
@@ -2611,38 +2632,37 @@
           <a:p>
             <a:pPr lvl="0"/>
             <a:r>
-              <a:rPr lang="zh-TW" altLang="en-US" smtClean="0"/>
+              <a:rPr lang="zh-TW" altLang="en-US"/>
               <a:t>按一下以編輯母片文字樣式</a:t>
             </a:r>
           </a:p>
           <a:p>
             <a:pPr lvl="1"/>
             <a:r>
-              <a:rPr lang="zh-TW" altLang="en-US" smtClean="0"/>
+              <a:rPr lang="zh-TW" altLang="en-US"/>
               <a:t>第二層</a:t>
             </a:r>
           </a:p>
           <a:p>
             <a:pPr lvl="2"/>
             <a:r>
-              <a:rPr lang="zh-TW" altLang="en-US" smtClean="0"/>
+              <a:rPr lang="zh-TW" altLang="en-US"/>
               <a:t>第三層</a:t>
             </a:r>
           </a:p>
           <a:p>
             <a:pPr lvl="3"/>
             <a:r>
-              <a:rPr lang="zh-TW" altLang="en-US" smtClean="0"/>
+              <a:rPr lang="zh-TW" altLang="en-US"/>
               <a:t>第四層</a:t>
             </a:r>
           </a:p>
           <a:p>
             <a:pPr lvl="4"/>
             <a:r>
-              <a:rPr lang="zh-TW" altLang="en-US" smtClean="0"/>
+              <a:rPr lang="zh-TW" altLang="en-US"/>
               <a:t>第五層</a:t>
             </a:r>
-            <a:endParaRPr lang="zh-TW" altLang="en-US"/>
           </a:p>
         </p:txBody>
       </p:sp>
@@ -2658,8 +2678,8 @@
         </p:nvSpPr>
         <p:spPr>
           <a:xfrm>
-            <a:off x="457200" y="6356350"/>
-            <a:ext cx="2133600" cy="365125"/>
+            <a:off x="609600" y="6356351"/>
+            <a:ext cx="2844800" cy="365125"/>
           </a:xfrm>
           <a:prstGeom prst="rect">
             <a:avLst/>
@@ -2681,7 +2701,7 @@
           <a:p>
             <a:fld id="{15583AF3-A962-4DB7-B241-BE1DA4E52681}" type="datetimeFigureOut">
               <a:rPr lang="zh-TW" altLang="en-US" smtClean="0"/>
-              <a:t>2018/11/17</a:t>
+              <a:t>2024/12/7</a:t>
             </a:fld>
             <a:endParaRPr lang="zh-TW" altLang="en-US"/>
           </a:p>
@@ -2699,8 +2719,8 @@
         </p:nvSpPr>
         <p:spPr>
           <a:xfrm>
-            <a:off x="3124200" y="6356350"/>
-            <a:ext cx="2895600" cy="365125"/>
+            <a:off x="4165600" y="6356351"/>
+            <a:ext cx="3860800" cy="365125"/>
           </a:xfrm>
           <a:prstGeom prst="rect">
             <a:avLst/>
@@ -2736,8 +2756,8 @@
         </p:nvSpPr>
         <p:spPr>
           <a:xfrm>
-            <a:off x="6553200" y="6356350"/>
-            <a:ext cx="2133600" cy="365125"/>
+            <a:off x="8737600" y="6356351"/>
+            <a:ext cx="2844800" cy="365125"/>
           </a:xfrm>
           <a:prstGeom prst="rect">
             <a:avLst/>
@@ -3061,22 +3081,125 @@
             <p:ph type="title"/>
           </p:nvPr>
         </p:nvSpPr>
-        <p:spPr/>
-        <p:txBody>
-          <a:bodyPr/>
-          <a:lstStyle/>
-          <a:p>
-            <a:r>
-              <a:rPr lang="zh-TW" altLang="en-US" b="1" dirty="0" smtClean="0">
-                <a:solidFill>
-                  <a:srgbClr val="000066"/>
-                </a:solidFill>
+        <p:spPr>
+          <a:xfrm>
+            <a:off x="0" y="2660915"/>
+            <a:ext cx="12192000" cy="1143000"/>
+          </a:xfrm>
+        </p:spPr>
+        <p:txBody>
+          <a:bodyPr>
+            <a:noAutofit/>
+          </a:bodyPr>
+          <a:lstStyle/>
+          <a:p>
+            <a:r>
+              <a:rPr lang="zh-CN" altLang="en-US" sz="7200" b="1" i="1" dirty="0">
+                <a:solidFill>
+                  <a:srgbClr val="000066"/>
+                </a:solidFill>
+                <a:effectLst>
+                  <a:outerShdw blurRad="38100" dist="38100" dir="2700000" algn="tl">
+                    <a:srgbClr val="000000">
+                      <a:alpha val="43137"/>
+                    </a:srgbClr>
+                  </a:outerShdw>
+                </a:effectLst>
                 <a:latin typeface="微軟正黑體" pitchFamily="34" charset="-120"/>
                 <a:ea typeface="微軟正黑體" pitchFamily="34" charset="-120"/>
               </a:rPr>
               <a:t>我有喜樂</a:t>
             </a:r>
-            <a:endParaRPr lang="zh-TW" altLang="en-US" b="1" dirty="0">
+            <a:endParaRPr lang="zh-TW" altLang="en-US" sz="7200" b="1" i="1" dirty="0">
+              <a:solidFill>
+                <a:srgbClr val="000066"/>
+              </a:solidFill>
+              <a:effectLst>
+                <a:outerShdw blurRad="38100" dist="38100" dir="2700000" algn="tl">
+                  <a:srgbClr val="000000">
+                    <a:alpha val="43137"/>
+                  </a:srgbClr>
+                </a:outerShdw>
+              </a:effectLst>
+              <a:latin typeface="微軟正黑體" pitchFamily="34" charset="-120"/>
+              <a:ea typeface="微軟正黑體" pitchFamily="34" charset="-120"/>
+            </a:endParaRPr>
+          </a:p>
+        </p:txBody>
+      </p:sp>
+    </p:spTree>
+  </p:cSld>
+  <p:clrMapOvr>
+    <a:masterClrMapping/>
+  </p:clrMapOvr>
+</p:sld>
+</file>
+
+<file path=ppt/slides/slide10.xml><?xml version="1.0" encoding="utf-8"?>
+<p:sld xmlns:a="http://schemas.openxmlformats.org/drawingml/2006/main" xmlns:r="http://schemas.openxmlformats.org/officeDocument/2006/relationships" xmlns:p="http://schemas.openxmlformats.org/presentationml/2006/main">
+  <p:cSld>
+    <p:spTree>
+      <p:nvGrpSpPr>
+        <p:cNvPr id="1" name="">
+          <a:extLst>
+            <a:ext uri="{FF2B5EF4-FFF2-40B4-BE49-F238E27FC236}">
+              <a16:creationId xmlns:a16="http://schemas.microsoft.com/office/drawing/2014/main" id="{9CE8DCEA-A4BC-2525-FB1E-406B7A2A99FE}"/>
+            </a:ext>
+          </a:extLst>
+        </p:cNvPr>
+        <p:cNvGrpSpPr/>
+        <p:nvPr/>
+      </p:nvGrpSpPr>
+      <p:grpSpPr>
+        <a:xfrm>
+          <a:off x="0" y="0"/>
+          <a:ext cx="0" cy="0"/>
+          <a:chOff x="0" y="0"/>
+          <a:chExt cx="0" cy="0"/>
+        </a:xfrm>
+      </p:grpSpPr>
+      <p:sp>
+        <p:nvSpPr>
+          <p:cNvPr id="5" name="內容版面配置區 4">
+            <a:extLst>
+              <a:ext uri="{FF2B5EF4-FFF2-40B4-BE49-F238E27FC236}">
+                <a16:creationId xmlns:a16="http://schemas.microsoft.com/office/drawing/2014/main" id="{44DE8645-054D-5C1C-AF17-BB85EBFA6BD4}"/>
+              </a:ext>
+            </a:extLst>
+          </p:cNvPr>
+          <p:cNvSpPr>
+            <a:spLocks noGrp="1"/>
+          </p:cNvSpPr>
+          <p:nvPr>
+            <p:ph idx="1"/>
+          </p:nvPr>
+        </p:nvSpPr>
+        <p:spPr>
+          <a:xfrm>
+            <a:off x="0" y="2084851"/>
+            <a:ext cx="12192000" cy="2404863"/>
+          </a:xfrm>
+        </p:spPr>
+        <p:txBody>
+          <a:bodyPr anchor="ctr">
+            <a:normAutofit/>
+          </a:bodyPr>
+          <a:lstStyle/>
+          <a:p>
+            <a:pPr algn="ctr">
+              <a:buNone/>
+            </a:pPr>
+            <a:r>
+              <a:rPr lang="zh-TW" altLang="en-US" sz="6400" b="1" dirty="0">
+                <a:solidFill>
+                  <a:srgbClr val="000066"/>
+                </a:solidFill>
+                <a:latin typeface="微軟正黑體" pitchFamily="34" charset="-120"/>
+                <a:ea typeface="微軟正黑體" pitchFamily="34" charset="-120"/>
+              </a:rPr>
+              <a:t>我要來跳舞  為主跳舞</a:t>
+            </a:r>
+            <a:endParaRPr lang="en-US" altLang="zh-TW" sz="6400" b="1" dirty="0">
               <a:solidFill>
                 <a:srgbClr val="000066"/>
               </a:solidFill>
@@ -3084,49 +3207,21 @@
               <a:ea typeface="微軟正黑體" pitchFamily="34" charset="-120"/>
             </a:endParaRPr>
           </a:p>
-        </p:txBody>
-      </p:sp>
-      <p:sp>
-        <p:nvSpPr>
-          <p:cNvPr id="5" name="內容版面配置區 4"/>
-          <p:cNvSpPr>
-            <a:spLocks noGrp="1"/>
-          </p:cNvSpPr>
-          <p:nvPr>
-            <p:ph idx="1"/>
-          </p:nvPr>
-        </p:nvSpPr>
-        <p:spPr/>
-        <p:txBody>
-          <a:bodyPr>
-            <a:normAutofit/>
-          </a:bodyPr>
-          <a:lstStyle/>
           <a:p>
             <a:pPr algn="ctr">
               <a:buNone/>
             </a:pPr>
             <a:r>
-              <a:rPr lang="zh-TW" altLang="en-US" sz="5400" b="1" dirty="0">
+              <a:rPr lang="zh-TW" altLang="en-US" sz="6400" b="1" dirty="0">
                 <a:solidFill>
                   <a:srgbClr val="000066"/>
                 </a:solidFill>
                 <a:latin typeface="微軟正黑體" pitchFamily="34" charset="-120"/>
                 <a:ea typeface="微軟正黑體" pitchFamily="34" charset="-120"/>
               </a:rPr>
-              <a:t>我有喜樂在我</a:t>
-            </a:r>
-            <a:r>
-              <a:rPr lang="zh-TW" altLang="en-US" sz="5400" b="1" dirty="0" smtClean="0">
-                <a:solidFill>
-                  <a:srgbClr val="000066"/>
-                </a:solidFill>
-                <a:latin typeface="微軟正黑體" pitchFamily="34" charset="-120"/>
-                <a:ea typeface="微軟正黑體" pitchFamily="34" charset="-120"/>
-              </a:rPr>
-              <a:t>心</a:t>
-            </a:r>
-            <a:endParaRPr lang="en-US" altLang="zh-TW" sz="5400" b="1" dirty="0" smtClean="0">
+              <a:t>來跳舞  為主跳舞</a:t>
+            </a:r>
+            <a:endParaRPr lang="en-US" altLang="zh-TW" sz="6400" b="1" dirty="0">
               <a:solidFill>
                 <a:srgbClr val="000066"/>
               </a:solidFill>
@@ -3134,41 +3229,185 @@
               <a:ea typeface="微軟正黑體" pitchFamily="34" charset="-120"/>
             </a:endParaRPr>
           </a:p>
+        </p:txBody>
+      </p:sp>
+      <p:sp>
+        <p:nvSpPr>
+          <p:cNvPr id="3" name="TextBox 2">
+            <a:extLst>
+              <a:ext uri="{FF2B5EF4-FFF2-40B4-BE49-F238E27FC236}">
+                <a16:creationId xmlns:a16="http://schemas.microsoft.com/office/drawing/2014/main" id="{A50C5D6E-176E-C749-6F4F-5968F93504B0}"/>
+              </a:ext>
+            </a:extLst>
+          </p:cNvPr>
+          <p:cNvSpPr txBox="1"/>
+          <p:nvPr/>
+        </p:nvSpPr>
+        <p:spPr>
+          <a:xfrm>
+            <a:off x="0" y="5157192"/>
+            <a:ext cx="12192000" cy="666786"/>
+          </a:xfrm>
+          <a:prstGeom prst="rect">
+            <a:avLst/>
+          </a:prstGeom>
+          <a:noFill/>
+        </p:spPr>
+        <p:txBody>
+          <a:bodyPr wrap="square" rtlCol="0">
+            <a:spAutoFit/>
+          </a:bodyPr>
+          <a:lstStyle/>
+          <a:p>
+            <a:pPr algn="ctr"/>
+            <a:r>
+              <a:rPr lang="en-US" sz="3733" b="1" dirty="0">
+                <a:solidFill>
+                  <a:srgbClr val="000066"/>
+                </a:solidFill>
+                <a:latin typeface="+mj-lt"/>
+                <a:ea typeface="Microsoft JhengHei" panose="020B0604030504040204" pitchFamily="34" charset="-120"/>
+              </a:rPr>
+              <a:t>( 5</a:t>
+            </a:r>
+            <a:r>
+              <a:rPr lang="zh-CN" altLang="en-US" sz="3733" b="1" dirty="0">
+                <a:solidFill>
+                  <a:srgbClr val="000066"/>
+                </a:solidFill>
+                <a:latin typeface="+mj-lt"/>
+                <a:ea typeface="Microsoft JhengHei" panose="020B0604030504040204" pitchFamily="34" charset="-120"/>
+              </a:rPr>
+              <a:t> </a:t>
+            </a:r>
+            <a:r>
+              <a:rPr lang="en-US" altLang="zh-CN" sz="3733" b="1" dirty="0">
+                <a:solidFill>
+                  <a:srgbClr val="000066"/>
+                </a:solidFill>
+                <a:latin typeface="+mj-lt"/>
+                <a:ea typeface="Microsoft JhengHei" panose="020B0604030504040204" pitchFamily="34" charset="-120"/>
+              </a:rPr>
+              <a:t>/</a:t>
+            </a:r>
+            <a:r>
+              <a:rPr lang="zh-CN" altLang="en-US" sz="3733" b="1" dirty="0">
+                <a:solidFill>
+                  <a:srgbClr val="000066"/>
+                </a:solidFill>
+                <a:latin typeface="+mj-lt"/>
+                <a:ea typeface="Microsoft JhengHei" panose="020B0604030504040204" pitchFamily="34" charset="-120"/>
+              </a:rPr>
+              <a:t> </a:t>
+            </a:r>
+            <a:r>
+              <a:rPr lang="en-US" altLang="zh-CN" sz="3733" b="1" dirty="0">
+                <a:solidFill>
+                  <a:srgbClr val="000066"/>
+                </a:solidFill>
+                <a:latin typeface="+mj-lt"/>
+                <a:ea typeface="Microsoft JhengHei" panose="020B0604030504040204" pitchFamily="34" charset="-120"/>
+              </a:rPr>
+              <a:t>6</a:t>
+            </a:r>
+            <a:r>
+              <a:rPr lang="en-US" sz="3733" b="1" dirty="0">
+                <a:solidFill>
+                  <a:srgbClr val="000066"/>
+                </a:solidFill>
+                <a:latin typeface="+mj-lt"/>
+                <a:ea typeface="Microsoft JhengHei" panose="020B0604030504040204" pitchFamily="34" charset="-120"/>
+              </a:rPr>
+              <a:t> )</a:t>
+            </a:r>
+            <a:endParaRPr lang="vi-VN" sz="3733" b="1" dirty="0">
+              <a:solidFill>
+                <a:srgbClr val="000066"/>
+              </a:solidFill>
+              <a:latin typeface="+mj-lt"/>
+              <a:ea typeface="Microsoft JhengHei" panose="020B0604030504040204" pitchFamily="34" charset="-120"/>
+            </a:endParaRPr>
+          </a:p>
+        </p:txBody>
+      </p:sp>
+    </p:spTree>
+    <p:extLst>
+      <p:ext uri="{BB962C8B-B14F-4D97-AF65-F5344CB8AC3E}">
+        <p14:creationId xmlns:p14="http://schemas.microsoft.com/office/powerpoint/2010/main" val="740662736"/>
+      </p:ext>
+    </p:extLst>
+  </p:cSld>
+  <p:clrMapOvr>
+    <a:masterClrMapping/>
+  </p:clrMapOvr>
+</p:sld>
+</file>
+
+<file path=ppt/slides/slide11.xml><?xml version="1.0" encoding="utf-8"?>
+<p:sld xmlns:a="http://schemas.openxmlformats.org/drawingml/2006/main" xmlns:r="http://schemas.openxmlformats.org/officeDocument/2006/relationships" xmlns:p="http://schemas.openxmlformats.org/presentationml/2006/main">
+  <p:cSld>
+    <p:spTree>
+      <p:nvGrpSpPr>
+        <p:cNvPr id="1" name="">
+          <a:extLst>
+            <a:ext uri="{FF2B5EF4-FFF2-40B4-BE49-F238E27FC236}">
+              <a16:creationId xmlns:a16="http://schemas.microsoft.com/office/drawing/2014/main" id="{07789634-6001-CF80-5944-DF94F342010B}"/>
+            </a:ext>
+          </a:extLst>
+        </p:cNvPr>
+        <p:cNvGrpSpPr/>
+        <p:nvPr/>
+      </p:nvGrpSpPr>
+      <p:grpSpPr>
+        <a:xfrm>
+          <a:off x="0" y="0"/>
+          <a:ext cx="0" cy="0"/>
+          <a:chOff x="0" y="0"/>
+          <a:chExt cx="0" cy="0"/>
+        </a:xfrm>
+      </p:grpSpPr>
+      <p:sp>
+        <p:nvSpPr>
+          <p:cNvPr id="5" name="內容版面配置區 4">
+            <a:extLst>
+              <a:ext uri="{FF2B5EF4-FFF2-40B4-BE49-F238E27FC236}">
+                <a16:creationId xmlns:a16="http://schemas.microsoft.com/office/drawing/2014/main" id="{CF692324-5008-EF69-2101-348C899D77E5}"/>
+              </a:ext>
+            </a:extLst>
+          </p:cNvPr>
+          <p:cNvSpPr>
+            <a:spLocks noGrp="1"/>
+          </p:cNvSpPr>
+          <p:nvPr>
+            <p:ph idx="1"/>
+          </p:nvPr>
+        </p:nvSpPr>
+        <p:spPr>
+          <a:xfrm>
+            <a:off x="0" y="2084851"/>
+            <a:ext cx="12192000" cy="2404863"/>
+          </a:xfrm>
+        </p:spPr>
+        <p:txBody>
+          <a:bodyPr anchor="ctr">
+            <a:normAutofit/>
+          </a:bodyPr>
+          <a:lstStyle/>
           <a:p>
             <a:pPr algn="ctr">
               <a:buNone/>
             </a:pPr>
             <a:r>
-              <a:rPr lang="zh-TW" altLang="en-US" sz="5400" b="1" dirty="0" smtClean="0">
+              <a:rPr lang="zh-TW" altLang="en-US" sz="6400" b="1" dirty="0">
                 <a:solidFill>
                   <a:srgbClr val="000066"/>
                 </a:solidFill>
                 <a:latin typeface="微軟正黑體" pitchFamily="34" charset="-120"/>
                 <a:ea typeface="微軟正黑體" pitchFamily="34" charset="-120"/>
               </a:rPr>
-              <a:t>我</a:t>
-            </a:r>
-            <a:r>
-              <a:rPr lang="zh-TW" altLang="en-US" sz="5400" b="1" dirty="0">
-                <a:solidFill>
-                  <a:srgbClr val="000066"/>
-                </a:solidFill>
-                <a:latin typeface="微軟正黑體" pitchFamily="34" charset="-120"/>
-                <a:ea typeface="微軟正黑體" pitchFamily="34" charset="-120"/>
-              </a:rPr>
-              <a:t>有喜樂在我</a:t>
-            </a:r>
-            <a:r>
-              <a:rPr lang="zh-TW" altLang="en-US" sz="5400" b="1" dirty="0" smtClean="0">
-                <a:solidFill>
-                  <a:srgbClr val="000066"/>
-                </a:solidFill>
-                <a:latin typeface="微軟正黑體" pitchFamily="34" charset="-120"/>
-                <a:ea typeface="微軟正黑體" pitchFamily="34" charset="-120"/>
-              </a:rPr>
-              <a:t>心</a:t>
-            </a:r>
-            <a:endParaRPr lang="en-US" altLang="zh-TW" sz="5400" b="1" dirty="0">
+              <a:t>來跳舞  為主跳舞</a:t>
+            </a:r>
+            <a:endParaRPr lang="en-US" altLang="zh-TW" sz="6400" b="1" dirty="0">
               <a:solidFill>
                 <a:srgbClr val="000066"/>
               </a:solidFill>
@@ -3181,36 +3420,195 @@
               <a:buNone/>
             </a:pPr>
             <a:r>
-              <a:rPr lang="zh-TW" altLang="en-US" sz="5400" b="1" dirty="0" smtClean="0">
+              <a:rPr lang="zh-TW" altLang="en-US" sz="6400" b="1" dirty="0">
                 <a:solidFill>
                   <a:srgbClr val="000066"/>
                 </a:solidFill>
                 <a:latin typeface="微軟正黑體" pitchFamily="34" charset="-120"/>
                 <a:ea typeface="微軟正黑體" pitchFamily="34" charset="-120"/>
               </a:rPr>
-              <a:t>我</a:t>
-            </a:r>
-            <a:r>
-              <a:rPr lang="zh-TW" altLang="en-US" sz="5400" b="1" dirty="0">
+              <a:t>主的喜樂無人能奪去</a:t>
+            </a:r>
+          </a:p>
+        </p:txBody>
+      </p:sp>
+      <p:sp>
+        <p:nvSpPr>
+          <p:cNvPr id="3" name="TextBox 2">
+            <a:extLst>
+              <a:ext uri="{FF2B5EF4-FFF2-40B4-BE49-F238E27FC236}">
+                <a16:creationId xmlns:a16="http://schemas.microsoft.com/office/drawing/2014/main" id="{430A4FCC-045B-5EEE-1469-3E56C05F55E2}"/>
+              </a:ext>
+            </a:extLst>
+          </p:cNvPr>
+          <p:cNvSpPr txBox="1"/>
+          <p:nvPr/>
+        </p:nvSpPr>
+        <p:spPr>
+          <a:xfrm>
+            <a:off x="0" y="5157192"/>
+            <a:ext cx="12192000" cy="666786"/>
+          </a:xfrm>
+          <a:prstGeom prst="rect">
+            <a:avLst/>
+          </a:prstGeom>
+          <a:noFill/>
+        </p:spPr>
+        <p:txBody>
+          <a:bodyPr wrap="square" rtlCol="0">
+            <a:spAutoFit/>
+          </a:bodyPr>
+          <a:lstStyle/>
+          <a:p>
+            <a:pPr algn="ctr"/>
+            <a:r>
+              <a:rPr lang="en-US" sz="3733" b="1" dirty="0">
+                <a:solidFill>
+                  <a:srgbClr val="000066"/>
+                </a:solidFill>
+                <a:latin typeface="+mj-lt"/>
+                <a:ea typeface="Microsoft JhengHei" panose="020B0604030504040204" pitchFamily="34" charset="-120"/>
+              </a:rPr>
+              <a:t>( 5</a:t>
+            </a:r>
+            <a:r>
+              <a:rPr lang="zh-CN" altLang="en-US" sz="3733" b="1" dirty="0">
+                <a:solidFill>
+                  <a:srgbClr val="000066"/>
+                </a:solidFill>
+                <a:latin typeface="+mj-lt"/>
+                <a:ea typeface="Microsoft JhengHei" panose="020B0604030504040204" pitchFamily="34" charset="-120"/>
+              </a:rPr>
+              <a:t> </a:t>
+            </a:r>
+            <a:r>
+              <a:rPr lang="en-US" altLang="zh-CN" sz="3733" b="1" dirty="0">
+                <a:solidFill>
+                  <a:srgbClr val="000066"/>
+                </a:solidFill>
+                <a:latin typeface="+mj-lt"/>
+                <a:ea typeface="Microsoft JhengHei" panose="020B0604030504040204" pitchFamily="34" charset="-120"/>
+              </a:rPr>
+              <a:t>/</a:t>
+            </a:r>
+            <a:r>
+              <a:rPr lang="zh-CN" altLang="en-US" sz="3733" b="1" dirty="0">
+                <a:solidFill>
+                  <a:srgbClr val="000066"/>
+                </a:solidFill>
+                <a:latin typeface="+mj-lt"/>
+                <a:ea typeface="Microsoft JhengHei" panose="020B0604030504040204" pitchFamily="34" charset="-120"/>
+              </a:rPr>
+              <a:t> </a:t>
+            </a:r>
+            <a:r>
+              <a:rPr lang="en-US" altLang="zh-CN" sz="3733" b="1" dirty="0">
+                <a:solidFill>
+                  <a:srgbClr val="000066"/>
+                </a:solidFill>
+                <a:latin typeface="+mj-lt"/>
+                <a:ea typeface="Microsoft JhengHei" panose="020B0604030504040204" pitchFamily="34" charset="-120"/>
+              </a:rPr>
+              <a:t>6</a:t>
+            </a:r>
+            <a:r>
+              <a:rPr lang="en-US" sz="3733" b="1" dirty="0">
+                <a:solidFill>
+                  <a:srgbClr val="000066"/>
+                </a:solidFill>
+                <a:latin typeface="+mj-lt"/>
+                <a:ea typeface="Microsoft JhengHei" panose="020B0604030504040204" pitchFamily="34" charset="-120"/>
+              </a:rPr>
+              <a:t> )</a:t>
+            </a:r>
+            <a:endParaRPr lang="vi-VN" sz="3733" b="1" dirty="0">
+              <a:solidFill>
+                <a:srgbClr val="000066"/>
+              </a:solidFill>
+              <a:latin typeface="+mj-lt"/>
+              <a:ea typeface="Microsoft JhengHei" panose="020B0604030504040204" pitchFamily="34" charset="-120"/>
+            </a:endParaRPr>
+          </a:p>
+        </p:txBody>
+      </p:sp>
+    </p:spTree>
+    <p:extLst>
+      <p:ext uri="{BB962C8B-B14F-4D97-AF65-F5344CB8AC3E}">
+        <p14:creationId xmlns:p14="http://schemas.microsoft.com/office/powerpoint/2010/main" val="398787439"/>
+      </p:ext>
+    </p:extLst>
+  </p:cSld>
+  <p:clrMapOvr>
+    <a:masterClrMapping/>
+  </p:clrMapOvr>
+</p:sld>
+</file>
+
+<file path=ppt/slides/slide12.xml><?xml version="1.0" encoding="utf-8"?>
+<p:sld xmlns:a="http://schemas.openxmlformats.org/drawingml/2006/main" xmlns:r="http://schemas.openxmlformats.org/officeDocument/2006/relationships" xmlns:p="http://schemas.openxmlformats.org/presentationml/2006/main">
+  <p:cSld>
+    <p:spTree>
+      <p:nvGrpSpPr>
+        <p:cNvPr id="1" name="">
+          <a:extLst>
+            <a:ext uri="{FF2B5EF4-FFF2-40B4-BE49-F238E27FC236}">
+              <a16:creationId xmlns:a16="http://schemas.microsoft.com/office/drawing/2014/main" id="{C5B75496-0D27-D6BC-2D5C-6C7F971485D9}"/>
+            </a:ext>
+          </a:extLst>
+        </p:cNvPr>
+        <p:cNvGrpSpPr/>
+        <p:nvPr/>
+      </p:nvGrpSpPr>
+      <p:grpSpPr>
+        <a:xfrm>
+          <a:off x="0" y="0"/>
+          <a:ext cx="0" cy="0"/>
+          <a:chOff x="0" y="0"/>
+          <a:chExt cx="0" cy="0"/>
+        </a:xfrm>
+      </p:grpSpPr>
+      <p:sp>
+        <p:nvSpPr>
+          <p:cNvPr id="5" name="內容版面配置區 4">
+            <a:extLst>
+              <a:ext uri="{FF2B5EF4-FFF2-40B4-BE49-F238E27FC236}">
+                <a16:creationId xmlns:a16="http://schemas.microsoft.com/office/drawing/2014/main" id="{27592EE2-989B-BA8E-9E55-DA734D734487}"/>
+              </a:ext>
+            </a:extLst>
+          </p:cNvPr>
+          <p:cNvSpPr>
+            <a:spLocks noGrp="1"/>
+          </p:cNvSpPr>
+          <p:nvPr>
+            <p:ph idx="1"/>
+          </p:nvPr>
+        </p:nvSpPr>
+        <p:spPr>
+          <a:xfrm>
+            <a:off x="0" y="2084851"/>
+            <a:ext cx="12192000" cy="2404863"/>
+          </a:xfrm>
+        </p:spPr>
+        <p:txBody>
+          <a:bodyPr anchor="ctr">
+            <a:normAutofit/>
+          </a:bodyPr>
+          <a:lstStyle/>
+          <a:p>
+            <a:pPr algn="ctr">
+              <a:buNone/>
+            </a:pPr>
+            <a:r>
+              <a:rPr lang="zh-TW" altLang="en-US" sz="6400" b="1" dirty="0">
                 <a:solidFill>
                   <a:srgbClr val="000066"/>
                 </a:solidFill>
                 <a:latin typeface="微軟正黑體" pitchFamily="34" charset="-120"/>
                 <a:ea typeface="微軟正黑體" pitchFamily="34" charset="-120"/>
               </a:rPr>
-              <a:t>有喜樂在我</a:t>
-            </a:r>
-            <a:r>
-              <a:rPr lang="zh-TW" altLang="en-US" sz="5400" b="1" dirty="0" smtClean="0">
-                <a:solidFill>
-                  <a:srgbClr val="000066"/>
-                </a:solidFill>
-                <a:latin typeface="微軟正黑體" pitchFamily="34" charset="-120"/>
-                <a:ea typeface="微軟正黑體" pitchFamily="34" charset="-120"/>
-              </a:rPr>
-              <a:t>心</a:t>
-            </a:r>
-            <a:endParaRPr lang="en-US" altLang="zh-TW" sz="5400" b="1" dirty="0" smtClean="0">
+              <a:t>我要來歡呼  大聲歡呼</a:t>
+            </a:r>
+            <a:endParaRPr lang="en-US" altLang="zh-TW" sz="6400" b="1" dirty="0">
               <a:solidFill>
                 <a:srgbClr val="000066"/>
               </a:solidFill>
@@ -3223,29 +3621,331 @@
               <a:buNone/>
             </a:pPr>
             <a:r>
-              <a:rPr lang="zh-TW" altLang="en-US" sz="5400" b="1" dirty="0" smtClean="0">
+              <a:rPr lang="zh-TW" altLang="en-US" sz="6400" b="1" dirty="0">
                 <a:solidFill>
                   <a:srgbClr val="000066"/>
                 </a:solidFill>
                 <a:latin typeface="微軟正黑體" pitchFamily="34" charset="-120"/>
                 <a:ea typeface="微軟正黑體" pitchFamily="34" charset="-120"/>
               </a:rPr>
-              <a:t>主</a:t>
-            </a:r>
-            <a:r>
-              <a:rPr lang="zh-TW" altLang="en-US" sz="5400" b="1" dirty="0">
+              <a:t>來歡呼  大聲歡呼</a:t>
+            </a:r>
+            <a:endParaRPr lang="en-US" altLang="zh-TW" sz="6400" b="1" dirty="0">
+              <a:solidFill>
+                <a:srgbClr val="000066"/>
+              </a:solidFill>
+              <a:latin typeface="微軟正黑體" pitchFamily="34" charset="-120"/>
+              <a:ea typeface="微軟正黑體" pitchFamily="34" charset="-120"/>
+            </a:endParaRPr>
+          </a:p>
+        </p:txBody>
+      </p:sp>
+      <p:sp>
+        <p:nvSpPr>
+          <p:cNvPr id="3" name="TextBox 2">
+            <a:extLst>
+              <a:ext uri="{FF2B5EF4-FFF2-40B4-BE49-F238E27FC236}">
+                <a16:creationId xmlns:a16="http://schemas.microsoft.com/office/drawing/2014/main" id="{3F1CDEF7-C223-CBC2-3755-FEE73F40674B}"/>
+              </a:ext>
+            </a:extLst>
+          </p:cNvPr>
+          <p:cNvSpPr txBox="1"/>
+          <p:nvPr/>
+        </p:nvSpPr>
+        <p:spPr>
+          <a:xfrm>
+            <a:off x="0" y="5157192"/>
+            <a:ext cx="12192000" cy="666786"/>
+          </a:xfrm>
+          <a:prstGeom prst="rect">
+            <a:avLst/>
+          </a:prstGeom>
+          <a:noFill/>
+        </p:spPr>
+        <p:txBody>
+          <a:bodyPr wrap="square" rtlCol="0">
+            <a:spAutoFit/>
+          </a:bodyPr>
+          <a:lstStyle/>
+          <a:p>
+            <a:pPr algn="ctr"/>
+            <a:r>
+              <a:rPr lang="en-US" sz="3733" b="1" dirty="0">
+                <a:solidFill>
+                  <a:srgbClr val="000066"/>
+                </a:solidFill>
+                <a:latin typeface="+mj-lt"/>
+                <a:ea typeface="Microsoft JhengHei" panose="020B0604030504040204" pitchFamily="34" charset="-120"/>
+              </a:rPr>
+              <a:t>( 6</a:t>
+            </a:r>
+            <a:r>
+              <a:rPr lang="zh-CN" altLang="en-US" sz="3733" b="1" dirty="0">
+                <a:solidFill>
+                  <a:srgbClr val="000066"/>
+                </a:solidFill>
+                <a:latin typeface="+mj-lt"/>
+                <a:ea typeface="Microsoft JhengHei" panose="020B0604030504040204" pitchFamily="34" charset="-120"/>
+              </a:rPr>
+              <a:t> </a:t>
+            </a:r>
+            <a:r>
+              <a:rPr lang="en-US" altLang="zh-CN" sz="3733" b="1" dirty="0">
+                <a:solidFill>
+                  <a:srgbClr val="000066"/>
+                </a:solidFill>
+                <a:latin typeface="+mj-lt"/>
+                <a:ea typeface="Microsoft JhengHei" panose="020B0604030504040204" pitchFamily="34" charset="-120"/>
+              </a:rPr>
+              <a:t>/</a:t>
+            </a:r>
+            <a:r>
+              <a:rPr lang="zh-CN" altLang="en-US" sz="3733" b="1" dirty="0">
+                <a:solidFill>
+                  <a:srgbClr val="000066"/>
+                </a:solidFill>
+                <a:latin typeface="+mj-lt"/>
+                <a:ea typeface="Microsoft JhengHei" panose="020B0604030504040204" pitchFamily="34" charset="-120"/>
+              </a:rPr>
+              <a:t> </a:t>
+            </a:r>
+            <a:r>
+              <a:rPr lang="en-US" altLang="zh-CN" sz="3733" b="1" dirty="0">
+                <a:solidFill>
+                  <a:srgbClr val="000066"/>
+                </a:solidFill>
+                <a:latin typeface="+mj-lt"/>
+                <a:ea typeface="Microsoft JhengHei" panose="020B0604030504040204" pitchFamily="34" charset="-120"/>
+              </a:rPr>
+              <a:t>6</a:t>
+            </a:r>
+            <a:r>
+              <a:rPr lang="en-US" sz="3733" b="1" dirty="0">
+                <a:solidFill>
+                  <a:srgbClr val="000066"/>
+                </a:solidFill>
+                <a:latin typeface="+mj-lt"/>
+                <a:ea typeface="Microsoft JhengHei" panose="020B0604030504040204" pitchFamily="34" charset="-120"/>
+              </a:rPr>
+              <a:t> )</a:t>
+            </a:r>
+            <a:endParaRPr lang="vi-VN" sz="3733" b="1" dirty="0">
+              <a:solidFill>
+                <a:srgbClr val="000066"/>
+              </a:solidFill>
+              <a:latin typeface="+mj-lt"/>
+              <a:ea typeface="Microsoft JhengHei" panose="020B0604030504040204" pitchFamily="34" charset="-120"/>
+            </a:endParaRPr>
+          </a:p>
+        </p:txBody>
+      </p:sp>
+    </p:spTree>
+    <p:extLst>
+      <p:ext uri="{BB962C8B-B14F-4D97-AF65-F5344CB8AC3E}">
+        <p14:creationId xmlns:p14="http://schemas.microsoft.com/office/powerpoint/2010/main" val="2588572582"/>
+      </p:ext>
+    </p:extLst>
+  </p:cSld>
+  <p:clrMapOvr>
+    <a:masterClrMapping/>
+  </p:clrMapOvr>
+</p:sld>
+</file>
+
+<file path=ppt/slides/slide13.xml><?xml version="1.0" encoding="utf-8"?>
+<p:sld xmlns:a="http://schemas.openxmlformats.org/drawingml/2006/main" xmlns:r="http://schemas.openxmlformats.org/officeDocument/2006/relationships" xmlns:p="http://schemas.openxmlformats.org/presentationml/2006/main">
+  <p:cSld>
+    <p:spTree>
+      <p:nvGrpSpPr>
+        <p:cNvPr id="1" name="">
+          <a:extLst>
+            <a:ext uri="{FF2B5EF4-FFF2-40B4-BE49-F238E27FC236}">
+              <a16:creationId xmlns:a16="http://schemas.microsoft.com/office/drawing/2014/main" id="{7E3EE293-1A18-912C-7E2C-83B1687D4906}"/>
+            </a:ext>
+          </a:extLst>
+        </p:cNvPr>
+        <p:cNvGrpSpPr/>
+        <p:nvPr/>
+      </p:nvGrpSpPr>
+      <p:grpSpPr>
+        <a:xfrm>
+          <a:off x="0" y="0"/>
+          <a:ext cx="0" cy="0"/>
+          <a:chOff x="0" y="0"/>
+          <a:chExt cx="0" cy="0"/>
+        </a:xfrm>
+      </p:grpSpPr>
+      <p:sp>
+        <p:nvSpPr>
+          <p:cNvPr id="5" name="內容版面配置區 4">
+            <a:extLst>
+              <a:ext uri="{FF2B5EF4-FFF2-40B4-BE49-F238E27FC236}">
+                <a16:creationId xmlns:a16="http://schemas.microsoft.com/office/drawing/2014/main" id="{61FE098B-7CC1-22FC-9838-F12F1B7BCA96}"/>
+              </a:ext>
+            </a:extLst>
+          </p:cNvPr>
+          <p:cNvSpPr>
+            <a:spLocks noGrp="1"/>
+          </p:cNvSpPr>
+          <p:nvPr>
+            <p:ph idx="1"/>
+          </p:nvPr>
+        </p:nvSpPr>
+        <p:spPr>
+          <a:xfrm>
+            <a:off x="0" y="2084851"/>
+            <a:ext cx="12192000" cy="2404863"/>
+          </a:xfrm>
+        </p:spPr>
+        <p:txBody>
+          <a:bodyPr anchor="ctr">
+            <a:normAutofit/>
+          </a:bodyPr>
+          <a:lstStyle/>
+          <a:p>
+            <a:pPr algn="ctr">
+              <a:buNone/>
+            </a:pPr>
+            <a:r>
+              <a:rPr lang="zh-TW" altLang="en-US" sz="6400" b="1" dirty="0">
                 <a:solidFill>
                   <a:srgbClr val="000066"/>
                 </a:solidFill>
                 <a:latin typeface="微軟正黑體" pitchFamily="34" charset="-120"/>
                 <a:ea typeface="微軟正黑體" pitchFamily="34" charset="-120"/>
               </a:rPr>
-              <a:t>的喜樂無人能奪去</a:t>
-            </a:r>
+              <a:t>來歡呼  大聲歡呼</a:t>
+            </a:r>
+            <a:endParaRPr lang="en-US" altLang="zh-TW" sz="6400" b="1" dirty="0">
+              <a:solidFill>
+                <a:srgbClr val="000066"/>
+              </a:solidFill>
+              <a:latin typeface="微軟正黑體" pitchFamily="34" charset="-120"/>
+              <a:ea typeface="微軟正黑體" pitchFamily="34" charset="-120"/>
+            </a:endParaRPr>
+          </a:p>
+          <a:p>
+            <a:pPr algn="ctr">
+              <a:buNone/>
+            </a:pPr>
+            <a:r>
+              <a:rPr lang="zh-TW" altLang="en-US" sz="6400" b="1" dirty="0">
+                <a:solidFill>
+                  <a:srgbClr val="000066"/>
+                </a:solidFill>
+                <a:latin typeface="微軟正黑體" pitchFamily="34" charset="-120"/>
+                <a:ea typeface="微軟正黑體" pitchFamily="34" charset="-120"/>
+              </a:rPr>
+              <a:t>在基督裡我已得自由</a:t>
+            </a:r>
+          </a:p>
+        </p:txBody>
+      </p:sp>
+      <p:sp>
+        <p:nvSpPr>
+          <p:cNvPr id="3" name="TextBox 2">
+            <a:extLst>
+              <a:ext uri="{FF2B5EF4-FFF2-40B4-BE49-F238E27FC236}">
+                <a16:creationId xmlns:a16="http://schemas.microsoft.com/office/drawing/2014/main" id="{4114229F-C3CD-C540-E410-2324D11B7641}"/>
+              </a:ext>
+            </a:extLst>
+          </p:cNvPr>
+          <p:cNvSpPr txBox="1"/>
+          <p:nvPr/>
+        </p:nvSpPr>
+        <p:spPr>
+          <a:xfrm>
+            <a:off x="0" y="5157192"/>
+            <a:ext cx="12192000" cy="666786"/>
+          </a:xfrm>
+          <a:prstGeom prst="rect">
+            <a:avLst/>
+          </a:prstGeom>
+          <a:noFill/>
+        </p:spPr>
+        <p:txBody>
+          <a:bodyPr wrap="square" rtlCol="0">
+            <a:spAutoFit/>
+          </a:bodyPr>
+          <a:lstStyle/>
+          <a:p>
+            <a:pPr algn="ctr"/>
+            <a:r>
+              <a:rPr lang="en-US" sz="3733" b="1" dirty="0">
+                <a:solidFill>
+                  <a:srgbClr val="000066"/>
+                </a:solidFill>
+                <a:latin typeface="+mj-lt"/>
+                <a:ea typeface="Microsoft JhengHei" panose="020B0604030504040204" pitchFamily="34" charset="-120"/>
+              </a:rPr>
+              <a:t>( 6</a:t>
+            </a:r>
+            <a:r>
+              <a:rPr lang="zh-CN" altLang="en-US" sz="3733" b="1" dirty="0">
+                <a:solidFill>
+                  <a:srgbClr val="000066"/>
+                </a:solidFill>
+                <a:latin typeface="+mj-lt"/>
+                <a:ea typeface="Microsoft JhengHei" panose="020B0604030504040204" pitchFamily="34" charset="-120"/>
+              </a:rPr>
+              <a:t> </a:t>
+            </a:r>
+            <a:r>
+              <a:rPr lang="en-US" altLang="zh-CN" sz="3733" b="1" dirty="0">
+                <a:solidFill>
+                  <a:srgbClr val="000066"/>
+                </a:solidFill>
+                <a:latin typeface="+mj-lt"/>
+                <a:ea typeface="Microsoft JhengHei" panose="020B0604030504040204" pitchFamily="34" charset="-120"/>
+              </a:rPr>
+              <a:t>/</a:t>
+            </a:r>
+            <a:r>
+              <a:rPr lang="zh-CN" altLang="en-US" sz="3733" b="1" dirty="0">
+                <a:solidFill>
+                  <a:srgbClr val="000066"/>
+                </a:solidFill>
+                <a:latin typeface="+mj-lt"/>
+                <a:ea typeface="Microsoft JhengHei" panose="020B0604030504040204" pitchFamily="34" charset="-120"/>
+              </a:rPr>
+              <a:t> </a:t>
+            </a:r>
+            <a:r>
+              <a:rPr lang="en-US" altLang="zh-CN" sz="3733" b="1" dirty="0">
+                <a:solidFill>
+                  <a:srgbClr val="000066"/>
+                </a:solidFill>
+                <a:latin typeface="+mj-lt"/>
+                <a:ea typeface="Microsoft JhengHei" panose="020B0604030504040204" pitchFamily="34" charset="-120"/>
+              </a:rPr>
+              <a:t>6</a:t>
+            </a:r>
+            <a:r>
+              <a:rPr lang="en-US" sz="3733" b="1" dirty="0">
+                <a:solidFill>
+                  <a:srgbClr val="000066"/>
+                </a:solidFill>
+                <a:latin typeface="+mj-lt"/>
+                <a:ea typeface="Microsoft JhengHei" panose="020B0604030504040204" pitchFamily="34" charset="-120"/>
+              </a:rPr>
+              <a:t> )</a:t>
+            </a:r>
+            <a:endParaRPr lang="vi-VN" sz="3733" b="1" dirty="0">
+              <a:solidFill>
+                <a:srgbClr val="000066"/>
+              </a:solidFill>
+              <a:latin typeface="+mj-lt"/>
+              <a:ea typeface="Microsoft JhengHei" panose="020B0604030504040204" pitchFamily="34" charset="-120"/>
+            </a:endParaRPr>
           </a:p>
         </p:txBody>
       </p:sp>
     </p:spTree>
+    <p:extLst>
+      <p:ext uri="{BB962C8B-B14F-4D97-AF65-F5344CB8AC3E}">
+        <p14:creationId xmlns:p14="http://schemas.microsoft.com/office/powerpoint/2010/main" val="637613856"/>
+      </p:ext>
+    </p:extLst>
   </p:cSld>
   <p:clrMapOvr>
     <a:masterClrMapping/>
@@ -3272,30 +3972,40 @@
       </p:grpSpPr>
       <p:sp>
         <p:nvSpPr>
-          <p:cNvPr id="4" name="標題 3"/>
-          <p:cNvSpPr>
-            <a:spLocks noGrp="1"/>
-          </p:cNvSpPr>
-          <p:nvPr>
-            <p:ph type="title"/>
-          </p:nvPr>
-        </p:nvSpPr>
-        <p:spPr/>
-        <p:txBody>
-          <a:bodyPr/>
-          <a:lstStyle/>
-          <a:p>
-            <a:r>
-              <a:rPr lang="zh-TW" altLang="en-US" b="1" dirty="0" smtClean="0">
+          <p:cNvPr id="5" name="內容版面配置區 4"/>
+          <p:cNvSpPr>
+            <a:spLocks noGrp="1"/>
+          </p:cNvSpPr>
+          <p:nvPr>
+            <p:ph idx="1"/>
+          </p:nvPr>
+        </p:nvSpPr>
+        <p:spPr>
+          <a:xfrm>
+            <a:off x="0" y="2084851"/>
+            <a:ext cx="12192000" cy="2404863"/>
+          </a:xfrm>
+        </p:spPr>
+        <p:txBody>
+          <a:bodyPr anchor="ctr">
+            <a:normAutofit/>
+          </a:bodyPr>
+          <a:lstStyle/>
+          <a:p>
+            <a:pPr algn="ctr">
+              <a:buNone/>
+            </a:pPr>
+            <a:r>
+              <a:rPr lang="zh-TW" altLang="en-US" sz="6400" b="1" dirty="0">
                 <a:solidFill>
                   <a:srgbClr val="000066"/>
                 </a:solidFill>
                 <a:latin typeface="微軟正黑體" pitchFamily="34" charset="-120"/>
                 <a:ea typeface="微軟正黑體" pitchFamily="34" charset="-120"/>
               </a:rPr>
-              <a:t>我有喜樂</a:t>
-            </a:r>
-            <a:endParaRPr lang="zh-TW" altLang="en-US" b="1" dirty="0">
+              <a:t>我有喜樂在我心</a:t>
+            </a:r>
+            <a:endParaRPr lang="en-US" altLang="zh-TW" sz="6400" b="1" dirty="0">
               <a:solidFill>
                 <a:srgbClr val="000066"/>
               </a:solidFill>
@@ -3303,94 +4013,119 @@
               <a:ea typeface="微軟正黑體" pitchFamily="34" charset="-120"/>
             </a:endParaRPr>
           </a:p>
-        </p:txBody>
-      </p:sp>
-      <p:sp>
-        <p:nvSpPr>
-          <p:cNvPr id="5" name="內容版面配置區 4"/>
-          <p:cNvSpPr>
-            <a:spLocks noGrp="1"/>
-          </p:cNvSpPr>
-          <p:nvPr>
-            <p:ph idx="1"/>
-          </p:nvPr>
-        </p:nvSpPr>
-        <p:spPr/>
-        <p:txBody>
-          <a:bodyPr>
-            <a:noAutofit/>
-          </a:bodyPr>
-          <a:lstStyle/>
           <a:p>
             <a:pPr algn="ctr">
               <a:buNone/>
             </a:pPr>
             <a:r>
-              <a:rPr lang="en-US" altLang="en-US" sz="4400" b="1" dirty="0" smtClean="0">
-                <a:solidFill>
-                  <a:srgbClr val="000066"/>
-                </a:solidFill>
-                <a:latin typeface="Times New Roman" pitchFamily="18" charset="0"/>
+              <a:rPr lang="zh-TW" altLang="en-US" sz="6400" b="1" dirty="0">
+                <a:solidFill>
+                  <a:srgbClr val="000066"/>
+                </a:solidFill>
+                <a:latin typeface="微軟正黑體" pitchFamily="34" charset="-120"/>
                 <a:ea typeface="微軟正黑體" pitchFamily="34" charset="-120"/>
-                <a:cs typeface="Times New Roman" pitchFamily="18" charset="0"/>
-              </a:rPr>
-              <a:t>I've got joy, joy in my heart</a:t>
-            </a:r>
-          </a:p>
-          <a:p>
-            <a:pPr algn="ctr">
-              <a:buNone/>
-            </a:pPr>
-            <a:r>
-              <a:rPr lang="en-US" altLang="en-US" sz="4400" b="1" dirty="0" smtClean="0">
-                <a:solidFill>
-                  <a:srgbClr val="000066"/>
-                </a:solidFill>
-                <a:latin typeface="Times New Roman" pitchFamily="18" charset="0"/>
-                <a:ea typeface="微軟正黑體" pitchFamily="34" charset="-120"/>
-                <a:cs typeface="Times New Roman" pitchFamily="18" charset="0"/>
-              </a:rPr>
-              <a:t>I've got joy, joy in my heart</a:t>
-            </a:r>
-          </a:p>
-          <a:p>
-            <a:pPr algn="ctr">
-              <a:buNone/>
-            </a:pPr>
-            <a:r>
-              <a:rPr lang="en-US" altLang="en-US" sz="4400" b="1" dirty="0" smtClean="0">
-                <a:solidFill>
-                  <a:srgbClr val="000066"/>
-                </a:solidFill>
-                <a:latin typeface="Times New Roman" pitchFamily="18" charset="0"/>
-                <a:ea typeface="微軟正黑體" pitchFamily="34" charset="-120"/>
-                <a:cs typeface="Times New Roman" pitchFamily="18" charset="0"/>
-              </a:rPr>
-              <a:t>I've got joy, joy in my heart</a:t>
-            </a:r>
-          </a:p>
-          <a:p>
-            <a:pPr algn="ctr">
-              <a:buNone/>
-            </a:pPr>
-            <a:r>
-              <a:rPr lang="en-US" altLang="en-US" sz="4400" b="1" dirty="0" smtClean="0">
-                <a:solidFill>
-                  <a:srgbClr val="000066"/>
-                </a:solidFill>
-                <a:latin typeface="Times New Roman" pitchFamily="18" charset="0"/>
-                <a:ea typeface="微軟正黑體" pitchFamily="34" charset="-120"/>
-                <a:cs typeface="Times New Roman" pitchFamily="18" charset="0"/>
-              </a:rPr>
-              <a:t>And the devil cannot take it away</a:t>
-            </a:r>
-            <a:endParaRPr lang="zh-TW" altLang="en-US" sz="4400" b="1" dirty="0">
+              </a:rPr>
+              <a:t>我有喜樂在我心</a:t>
+            </a:r>
+            <a:endParaRPr lang="en-US" altLang="zh-TW" sz="6400" b="1" dirty="0">
               <a:solidFill>
                 <a:srgbClr val="000066"/>
               </a:solidFill>
-              <a:latin typeface="Times New Roman" pitchFamily="18" charset="0"/>
+              <a:latin typeface="微軟正黑體" pitchFamily="34" charset="-120"/>
               <a:ea typeface="微軟正黑體" pitchFamily="34" charset="-120"/>
-              <a:cs typeface="Times New Roman" pitchFamily="18" charset="0"/>
+            </a:endParaRPr>
+          </a:p>
+        </p:txBody>
+      </p:sp>
+      <p:sp>
+        <p:nvSpPr>
+          <p:cNvPr id="3" name="TextBox 2"/>
+          <p:cNvSpPr txBox="1"/>
+          <p:nvPr/>
+        </p:nvSpPr>
+        <p:spPr>
+          <a:xfrm>
+            <a:off x="0" y="5157192"/>
+            <a:ext cx="12192000" cy="666786"/>
+          </a:xfrm>
+          <a:prstGeom prst="rect">
+            <a:avLst/>
+          </a:prstGeom>
+          <a:noFill/>
+        </p:spPr>
+        <p:txBody>
+          <a:bodyPr wrap="square" rtlCol="0">
+            <a:spAutoFit/>
+          </a:bodyPr>
+          <a:lstStyle/>
+          <a:p>
+            <a:pPr algn="ctr"/>
+            <a:r>
+              <a:rPr lang="en-US" sz="3733" b="1" dirty="0">
+                <a:solidFill>
+                  <a:srgbClr val="000066"/>
+                </a:solidFill>
+                <a:latin typeface="+mj-lt"/>
+                <a:ea typeface="Microsoft JhengHei" panose="020B0604030504040204" pitchFamily="34" charset="-120"/>
+              </a:rPr>
+              <a:t>( 1</a:t>
+            </a:r>
+            <a:r>
+              <a:rPr lang="zh-CN" altLang="en-US" sz="3733" b="1" dirty="0">
+                <a:solidFill>
+                  <a:srgbClr val="000066"/>
+                </a:solidFill>
+                <a:latin typeface="+mj-lt"/>
+                <a:ea typeface="Microsoft JhengHei" panose="020B0604030504040204" pitchFamily="34" charset="-120"/>
+              </a:rPr>
+              <a:t> </a:t>
+            </a:r>
+            <a:r>
+              <a:rPr lang="en-US" altLang="zh-CN" sz="3733" b="1" dirty="0">
+                <a:solidFill>
+                  <a:srgbClr val="000066"/>
+                </a:solidFill>
+                <a:latin typeface="+mj-lt"/>
+                <a:ea typeface="Microsoft JhengHei" panose="020B0604030504040204" pitchFamily="34" charset="-120"/>
+              </a:rPr>
+              <a:t>/</a:t>
+            </a:r>
+            <a:r>
+              <a:rPr lang="zh-CN" altLang="en-US" sz="3733" b="1" dirty="0">
+                <a:solidFill>
+                  <a:srgbClr val="000066"/>
+                </a:solidFill>
+                <a:latin typeface="+mj-lt"/>
+                <a:ea typeface="Microsoft JhengHei" panose="020B0604030504040204" pitchFamily="34" charset="-120"/>
+              </a:rPr>
+              <a:t> </a:t>
+            </a:r>
+            <a:r>
+              <a:rPr lang="en-US" altLang="zh-CN" sz="3733" b="1" dirty="0">
+                <a:solidFill>
+                  <a:srgbClr val="000066"/>
+                </a:solidFill>
+                <a:latin typeface="+mj-lt"/>
+                <a:ea typeface="Microsoft JhengHei" panose="020B0604030504040204" pitchFamily="34" charset="-120"/>
+              </a:rPr>
+              <a:t>6</a:t>
+            </a:r>
+            <a:r>
+              <a:rPr lang="en-US" sz="3733" b="1" dirty="0">
+                <a:solidFill>
+                  <a:srgbClr val="000066"/>
+                </a:solidFill>
+                <a:latin typeface="+mj-lt"/>
+                <a:ea typeface="Microsoft JhengHei" panose="020B0604030504040204" pitchFamily="34" charset="-120"/>
+              </a:rPr>
+              <a:t> )</a:t>
+            </a:r>
+            <a:endParaRPr lang="vi-VN" sz="3733" b="1" dirty="0">
+              <a:solidFill>
+                <a:srgbClr val="000066"/>
+              </a:solidFill>
+              <a:latin typeface="+mj-lt"/>
+              <a:ea typeface="Microsoft JhengHei" panose="020B0604030504040204" pitchFamily="34" charset="-120"/>
             </a:endParaRPr>
           </a:p>
         </p:txBody>
@@ -3408,7 +4143,13 @@
   <p:cSld>
     <p:spTree>
       <p:nvGrpSpPr>
-        <p:cNvPr id="1" name=""/>
+        <p:cNvPr id="1" name="">
+          <a:extLst>
+            <a:ext uri="{FF2B5EF4-FFF2-40B4-BE49-F238E27FC236}">
+              <a16:creationId xmlns:a16="http://schemas.microsoft.com/office/drawing/2014/main" id="{54249DA9-2AA3-A1E3-5C45-5AD1942CF82C}"/>
+            </a:ext>
+          </a:extLst>
+        </p:cNvPr>
         <p:cNvGrpSpPr/>
         <p:nvPr/>
       </p:nvGrpSpPr>
@@ -3422,30 +4163,46 @@
       </p:grpSpPr>
       <p:sp>
         <p:nvSpPr>
-          <p:cNvPr id="4" name="標題 3"/>
-          <p:cNvSpPr>
-            <a:spLocks noGrp="1"/>
-          </p:cNvSpPr>
-          <p:nvPr>
-            <p:ph type="title"/>
-          </p:nvPr>
-        </p:nvSpPr>
-        <p:spPr/>
-        <p:txBody>
-          <a:bodyPr/>
-          <a:lstStyle/>
-          <a:p>
-            <a:r>
-              <a:rPr lang="zh-TW" altLang="en-US" b="1" dirty="0" smtClean="0">
+          <p:cNvPr id="5" name="內容版面配置區 4">
+            <a:extLst>
+              <a:ext uri="{FF2B5EF4-FFF2-40B4-BE49-F238E27FC236}">
+                <a16:creationId xmlns:a16="http://schemas.microsoft.com/office/drawing/2014/main" id="{7849E690-1426-B270-2F23-8467E61830ED}"/>
+              </a:ext>
+            </a:extLst>
+          </p:cNvPr>
+          <p:cNvSpPr>
+            <a:spLocks noGrp="1"/>
+          </p:cNvSpPr>
+          <p:nvPr>
+            <p:ph idx="1"/>
+          </p:nvPr>
+        </p:nvSpPr>
+        <p:spPr>
+          <a:xfrm>
+            <a:off x="0" y="2084851"/>
+            <a:ext cx="12192000" cy="2404863"/>
+          </a:xfrm>
+        </p:spPr>
+        <p:txBody>
+          <a:bodyPr anchor="ctr">
+            <a:normAutofit/>
+          </a:bodyPr>
+          <a:lstStyle/>
+          <a:p>
+            <a:pPr algn="ctr">
+              <a:buNone/>
+            </a:pPr>
+            <a:r>
+              <a:rPr lang="zh-TW" altLang="en-US" sz="6400" b="1" dirty="0">
                 <a:solidFill>
                   <a:srgbClr val="000066"/>
                 </a:solidFill>
                 <a:latin typeface="微軟正黑體" pitchFamily="34" charset="-120"/>
                 <a:ea typeface="微軟正黑體" pitchFamily="34" charset="-120"/>
               </a:rPr>
-              <a:t>我有喜樂</a:t>
-            </a:r>
-            <a:endParaRPr lang="zh-TW" altLang="en-US" b="1" dirty="0">
+              <a:t>我有喜樂在我心</a:t>
+            </a:r>
+            <a:endParaRPr lang="en-US" altLang="zh-TW" sz="6400" b="1" dirty="0">
               <a:solidFill>
                 <a:srgbClr val="000066"/>
               </a:solidFill>
@@ -3453,168 +4210,128 @@
               <a:ea typeface="微軟正黑體" pitchFamily="34" charset="-120"/>
             </a:endParaRPr>
           </a:p>
-        </p:txBody>
-      </p:sp>
-      <p:sp>
-        <p:nvSpPr>
-          <p:cNvPr id="5" name="內容版面配置區 4"/>
-          <p:cNvSpPr>
-            <a:spLocks noGrp="1"/>
-          </p:cNvSpPr>
-          <p:nvPr>
-            <p:ph idx="1"/>
-          </p:nvPr>
-        </p:nvSpPr>
-        <p:spPr/>
-        <p:txBody>
-          <a:bodyPr>
-            <a:normAutofit/>
-          </a:bodyPr>
-          <a:lstStyle/>
           <a:p>
             <a:pPr algn="ctr">
               <a:buNone/>
             </a:pPr>
             <a:r>
-              <a:rPr lang="zh-TW" altLang="en-US" sz="5400" b="1" dirty="0">
+              <a:rPr lang="zh-TW" altLang="en-US" sz="6400" b="1" dirty="0">
                 <a:solidFill>
                   <a:srgbClr val="000066"/>
                 </a:solidFill>
                 <a:latin typeface="微軟正黑體" pitchFamily="34" charset="-120"/>
                 <a:ea typeface="微軟正黑體" pitchFamily="34" charset="-120"/>
               </a:rPr>
-              <a:t>我有喜樂在我</a:t>
-            </a:r>
-            <a:r>
-              <a:rPr lang="zh-TW" altLang="en-US" sz="5400" b="1" dirty="0" smtClean="0">
-                <a:solidFill>
-                  <a:srgbClr val="000066"/>
-                </a:solidFill>
-                <a:latin typeface="微軟正黑體" pitchFamily="34" charset="-120"/>
-                <a:ea typeface="微軟正黑體" pitchFamily="34" charset="-120"/>
-              </a:rPr>
-              <a:t>心</a:t>
-            </a:r>
-            <a:endParaRPr lang="en-US" altLang="zh-TW" sz="5400" b="1" dirty="0" smtClean="0">
+              <a:t>主的喜樂無人能奪去</a:t>
+            </a:r>
+          </a:p>
+        </p:txBody>
+      </p:sp>
+      <p:sp>
+        <p:nvSpPr>
+          <p:cNvPr id="3" name="TextBox 2">
+            <a:extLst>
+              <a:ext uri="{FF2B5EF4-FFF2-40B4-BE49-F238E27FC236}">
+                <a16:creationId xmlns:a16="http://schemas.microsoft.com/office/drawing/2014/main" id="{AF8AC1D6-C260-5E72-CC55-68E71834E531}"/>
+              </a:ext>
+            </a:extLst>
+          </p:cNvPr>
+          <p:cNvSpPr txBox="1"/>
+          <p:nvPr/>
+        </p:nvSpPr>
+        <p:spPr>
+          <a:xfrm>
+            <a:off x="0" y="5157192"/>
+            <a:ext cx="12192000" cy="666786"/>
+          </a:xfrm>
+          <a:prstGeom prst="rect">
+            <a:avLst/>
+          </a:prstGeom>
+          <a:noFill/>
+        </p:spPr>
+        <p:txBody>
+          <a:bodyPr wrap="square" rtlCol="0">
+            <a:spAutoFit/>
+          </a:bodyPr>
+          <a:lstStyle/>
+          <a:p>
+            <a:pPr algn="ctr"/>
+            <a:r>
+              <a:rPr lang="en-US" sz="3733" b="1" dirty="0">
+                <a:solidFill>
+                  <a:srgbClr val="000066"/>
+                </a:solidFill>
+                <a:latin typeface="+mj-lt"/>
+                <a:ea typeface="Microsoft JhengHei" panose="020B0604030504040204" pitchFamily="34" charset="-120"/>
+              </a:rPr>
+              <a:t>( 1</a:t>
+            </a:r>
+            <a:r>
+              <a:rPr lang="zh-CN" altLang="en-US" sz="3733" b="1" dirty="0">
+                <a:solidFill>
+                  <a:srgbClr val="000066"/>
+                </a:solidFill>
+                <a:latin typeface="+mj-lt"/>
+                <a:ea typeface="Microsoft JhengHei" panose="020B0604030504040204" pitchFamily="34" charset="-120"/>
+              </a:rPr>
+              <a:t> </a:t>
+            </a:r>
+            <a:r>
+              <a:rPr lang="en-US" altLang="zh-CN" sz="3733" b="1" dirty="0">
+                <a:solidFill>
+                  <a:srgbClr val="000066"/>
+                </a:solidFill>
+                <a:latin typeface="+mj-lt"/>
+                <a:ea typeface="Microsoft JhengHei" panose="020B0604030504040204" pitchFamily="34" charset="-120"/>
+              </a:rPr>
+              <a:t>/</a:t>
+            </a:r>
+            <a:r>
+              <a:rPr lang="zh-CN" altLang="en-US" sz="3733" b="1" dirty="0">
+                <a:solidFill>
+                  <a:srgbClr val="000066"/>
+                </a:solidFill>
+                <a:latin typeface="+mj-lt"/>
+                <a:ea typeface="Microsoft JhengHei" panose="020B0604030504040204" pitchFamily="34" charset="-120"/>
+              </a:rPr>
+              <a:t> </a:t>
+            </a:r>
+            <a:r>
+              <a:rPr lang="en-US" altLang="zh-CN" sz="3733" b="1" dirty="0">
+                <a:solidFill>
+                  <a:srgbClr val="000066"/>
+                </a:solidFill>
+                <a:latin typeface="+mj-lt"/>
+                <a:ea typeface="Microsoft JhengHei" panose="020B0604030504040204" pitchFamily="34" charset="-120"/>
+              </a:rPr>
+              <a:t>6</a:t>
+            </a:r>
+            <a:r>
+              <a:rPr lang="en-US" sz="3733" b="1" dirty="0">
+                <a:solidFill>
+                  <a:srgbClr val="000066"/>
+                </a:solidFill>
+                <a:latin typeface="+mj-lt"/>
+                <a:ea typeface="Microsoft JhengHei" panose="020B0604030504040204" pitchFamily="34" charset="-120"/>
+              </a:rPr>
+              <a:t> )</a:t>
+            </a:r>
+            <a:endParaRPr lang="vi-VN" sz="3733" b="1" dirty="0">
               <a:solidFill>
                 <a:srgbClr val="000066"/>
               </a:solidFill>
-              <a:latin typeface="微軟正黑體" pitchFamily="34" charset="-120"/>
-              <a:ea typeface="微軟正黑體" pitchFamily="34" charset="-120"/>
+              <a:latin typeface="+mj-lt"/>
+              <a:ea typeface="Microsoft JhengHei" panose="020B0604030504040204" pitchFamily="34" charset="-120"/>
             </a:endParaRPr>
           </a:p>
-          <a:p>
-            <a:pPr algn="ctr">
-              <a:buNone/>
-            </a:pPr>
-            <a:r>
-              <a:rPr lang="zh-TW" altLang="en-US" sz="5400" b="1" dirty="0" smtClean="0">
-                <a:solidFill>
-                  <a:srgbClr val="000066"/>
-                </a:solidFill>
-                <a:latin typeface="微軟正黑體" pitchFamily="34" charset="-120"/>
-                <a:ea typeface="微軟正黑體" pitchFamily="34" charset="-120"/>
-              </a:rPr>
-              <a:t>我</a:t>
-            </a:r>
-            <a:r>
-              <a:rPr lang="zh-TW" altLang="en-US" sz="5400" b="1" dirty="0">
-                <a:solidFill>
-                  <a:srgbClr val="000066"/>
-                </a:solidFill>
-                <a:latin typeface="微軟正黑體" pitchFamily="34" charset="-120"/>
-                <a:ea typeface="微軟正黑體" pitchFamily="34" charset="-120"/>
-              </a:rPr>
-              <a:t>有喜樂在我</a:t>
-            </a:r>
-            <a:r>
-              <a:rPr lang="zh-TW" altLang="en-US" sz="5400" b="1" dirty="0" smtClean="0">
-                <a:solidFill>
-                  <a:srgbClr val="000066"/>
-                </a:solidFill>
-                <a:latin typeface="微軟正黑體" pitchFamily="34" charset="-120"/>
-                <a:ea typeface="微軟正黑體" pitchFamily="34" charset="-120"/>
-              </a:rPr>
-              <a:t>心</a:t>
-            </a:r>
-            <a:endParaRPr lang="en-US" altLang="zh-TW" sz="5400" b="1" dirty="0">
-              <a:solidFill>
-                <a:srgbClr val="000066"/>
-              </a:solidFill>
-              <a:latin typeface="微軟正黑體" pitchFamily="34" charset="-120"/>
-              <a:ea typeface="微軟正黑體" pitchFamily="34" charset="-120"/>
-            </a:endParaRPr>
-          </a:p>
-          <a:p>
-            <a:pPr algn="ctr">
-              <a:buNone/>
-            </a:pPr>
-            <a:r>
-              <a:rPr lang="zh-TW" altLang="en-US" sz="5400" b="1" dirty="0" smtClean="0">
-                <a:solidFill>
-                  <a:srgbClr val="000066"/>
-                </a:solidFill>
-                <a:latin typeface="微軟正黑體" pitchFamily="34" charset="-120"/>
-                <a:ea typeface="微軟正黑體" pitchFamily="34" charset="-120"/>
-              </a:rPr>
-              <a:t>我</a:t>
-            </a:r>
-            <a:r>
-              <a:rPr lang="zh-TW" altLang="en-US" sz="5400" b="1" dirty="0">
-                <a:solidFill>
-                  <a:srgbClr val="000066"/>
-                </a:solidFill>
-                <a:latin typeface="微軟正黑體" pitchFamily="34" charset="-120"/>
-                <a:ea typeface="微軟正黑體" pitchFamily="34" charset="-120"/>
-              </a:rPr>
-              <a:t>有喜樂在我</a:t>
-            </a:r>
-            <a:r>
-              <a:rPr lang="zh-TW" altLang="en-US" sz="5400" b="1" dirty="0" smtClean="0">
-                <a:solidFill>
-                  <a:srgbClr val="000066"/>
-                </a:solidFill>
-                <a:latin typeface="微軟正黑體" pitchFamily="34" charset="-120"/>
-                <a:ea typeface="微軟正黑體" pitchFamily="34" charset="-120"/>
-              </a:rPr>
-              <a:t>心</a:t>
-            </a:r>
-            <a:endParaRPr lang="en-US" altLang="zh-TW" sz="5400" b="1" dirty="0" smtClean="0">
-              <a:solidFill>
-                <a:srgbClr val="000066"/>
-              </a:solidFill>
-              <a:latin typeface="微軟正黑體" pitchFamily="34" charset="-120"/>
-              <a:ea typeface="微軟正黑體" pitchFamily="34" charset="-120"/>
-            </a:endParaRPr>
-          </a:p>
-          <a:p>
-            <a:pPr algn="ctr">
-              <a:buNone/>
-            </a:pPr>
-            <a:r>
-              <a:rPr lang="zh-TW" altLang="en-US" sz="5400" b="1" dirty="0" smtClean="0">
-                <a:solidFill>
-                  <a:srgbClr val="000066"/>
-                </a:solidFill>
-                <a:latin typeface="微軟正黑體" pitchFamily="34" charset="-120"/>
-                <a:ea typeface="微軟正黑體" pitchFamily="34" charset="-120"/>
-              </a:rPr>
-              <a:t>主</a:t>
-            </a:r>
-            <a:r>
-              <a:rPr lang="zh-TW" altLang="en-US" sz="5400" b="1" dirty="0">
-                <a:solidFill>
-                  <a:srgbClr val="000066"/>
-                </a:solidFill>
-                <a:latin typeface="微軟正黑體" pitchFamily="34" charset="-120"/>
-                <a:ea typeface="微軟正黑體" pitchFamily="34" charset="-120"/>
-              </a:rPr>
-              <a:t>的喜樂無人能奪去</a:t>
-            </a:r>
-          </a:p>
         </p:txBody>
       </p:sp>
     </p:spTree>
+    <p:extLst>
+      <p:ext uri="{BB962C8B-B14F-4D97-AF65-F5344CB8AC3E}">
+        <p14:creationId xmlns:p14="http://schemas.microsoft.com/office/powerpoint/2010/main" val="876649248"/>
+      </p:ext>
+    </p:extLst>
   </p:cSld>
   <p:clrMapOvr>
     <a:masterClrMapping/>
@@ -3627,7 +4344,13 @@
   <p:cSld>
     <p:spTree>
       <p:nvGrpSpPr>
-        <p:cNvPr id="1" name=""/>
+        <p:cNvPr id="1" name="">
+          <a:extLst>
+            <a:ext uri="{FF2B5EF4-FFF2-40B4-BE49-F238E27FC236}">
+              <a16:creationId xmlns:a16="http://schemas.microsoft.com/office/drawing/2014/main" id="{7103549A-42D7-6821-9B31-4FE8B6AE9E85}"/>
+            </a:ext>
+          </a:extLst>
+        </p:cNvPr>
         <p:cNvGrpSpPr/>
         <p:nvPr/>
       </p:nvGrpSpPr>
@@ -3641,30 +4364,46 @@
       </p:grpSpPr>
       <p:sp>
         <p:nvSpPr>
-          <p:cNvPr id="4" name="標題 3"/>
-          <p:cNvSpPr>
-            <a:spLocks noGrp="1"/>
-          </p:cNvSpPr>
-          <p:nvPr>
-            <p:ph type="title"/>
-          </p:nvPr>
-        </p:nvSpPr>
-        <p:spPr/>
-        <p:txBody>
-          <a:bodyPr/>
-          <a:lstStyle/>
-          <a:p>
-            <a:r>
-              <a:rPr lang="zh-TW" altLang="en-US" b="1" dirty="0" smtClean="0">
+          <p:cNvPr id="5" name="內容版面配置區 4">
+            <a:extLst>
+              <a:ext uri="{FF2B5EF4-FFF2-40B4-BE49-F238E27FC236}">
+                <a16:creationId xmlns:a16="http://schemas.microsoft.com/office/drawing/2014/main" id="{BADF37B8-0D35-55F6-A6A4-722D17896ACF}"/>
+              </a:ext>
+            </a:extLst>
+          </p:cNvPr>
+          <p:cNvSpPr>
+            <a:spLocks noGrp="1"/>
+          </p:cNvSpPr>
+          <p:nvPr>
+            <p:ph idx="1"/>
+          </p:nvPr>
+        </p:nvSpPr>
+        <p:spPr>
+          <a:xfrm>
+            <a:off x="0" y="2084851"/>
+            <a:ext cx="12192000" cy="2404863"/>
+          </a:xfrm>
+        </p:spPr>
+        <p:txBody>
+          <a:bodyPr anchor="ctr">
+            <a:normAutofit/>
+          </a:bodyPr>
+          <a:lstStyle/>
+          <a:p>
+            <a:pPr algn="ctr">
+              <a:buNone/>
+            </a:pPr>
+            <a:r>
+              <a:rPr lang="zh-TW" altLang="en-US" sz="6400" b="1" dirty="0">
                 <a:solidFill>
                   <a:srgbClr val="000066"/>
                 </a:solidFill>
                 <a:latin typeface="微軟正黑體" pitchFamily="34" charset="-120"/>
                 <a:ea typeface="微軟正黑體" pitchFamily="34" charset="-120"/>
               </a:rPr>
-              <a:t>我有喜樂</a:t>
-            </a:r>
-            <a:endParaRPr lang="zh-TW" altLang="en-US" b="1" dirty="0">
+              <a:t>我有平安在我心</a:t>
+            </a:r>
+            <a:endParaRPr lang="en-US" altLang="zh-TW" sz="6400" b="1" dirty="0">
               <a:solidFill>
                 <a:srgbClr val="000066"/>
               </a:solidFill>
@@ -3672,30 +4411,12 @@
               <a:ea typeface="微軟正黑體" pitchFamily="34" charset="-120"/>
             </a:endParaRPr>
           </a:p>
-        </p:txBody>
-      </p:sp>
-      <p:sp>
-        <p:nvSpPr>
-          <p:cNvPr id="5" name="內容版面配置區 4"/>
-          <p:cNvSpPr>
-            <a:spLocks noGrp="1"/>
-          </p:cNvSpPr>
-          <p:nvPr>
-            <p:ph idx="1"/>
-          </p:nvPr>
-        </p:nvSpPr>
-        <p:spPr/>
-        <p:txBody>
-          <a:bodyPr>
-            <a:normAutofit/>
-          </a:bodyPr>
-          <a:lstStyle/>
           <a:p>
             <a:pPr algn="ctr">
               <a:buNone/>
             </a:pPr>
             <a:r>
-              <a:rPr lang="zh-TW" altLang="en-US" sz="5400" b="1" dirty="0" smtClean="0">
+              <a:rPr lang="zh-TW" altLang="en-US" sz="6400" b="1" dirty="0">
                 <a:solidFill>
                   <a:srgbClr val="000066"/>
                 </a:solidFill>
@@ -3704,7 +4425,7 @@
               </a:rPr>
               <a:t>我有平安在我心</a:t>
             </a:r>
-            <a:endParaRPr lang="en-US" altLang="zh-TW" sz="5400" b="1" dirty="0" smtClean="0">
+            <a:endParaRPr lang="en-US" altLang="zh-TW" sz="6400" b="1" dirty="0">
               <a:solidFill>
                 <a:srgbClr val="000066"/>
               </a:solidFill>
@@ -3712,75 +4433,113 @@
               <a:ea typeface="微軟正黑體" pitchFamily="34" charset="-120"/>
             </a:endParaRPr>
           </a:p>
-          <a:p>
-            <a:pPr algn="ctr">
-              <a:buNone/>
-            </a:pPr>
-            <a:r>
-              <a:rPr lang="zh-TW" altLang="en-US" sz="5400" b="1" dirty="0" smtClean="0">
-                <a:solidFill>
-                  <a:srgbClr val="000066"/>
-                </a:solidFill>
-                <a:latin typeface="微軟正黑體" pitchFamily="34" charset="-120"/>
-                <a:ea typeface="微軟正黑體" pitchFamily="34" charset="-120"/>
-              </a:rPr>
-              <a:t>我有平安在我心</a:t>
-            </a:r>
-            <a:endParaRPr lang="en-US" altLang="zh-TW" sz="5400" b="1" dirty="0" smtClean="0">
+        </p:txBody>
+      </p:sp>
+      <p:sp>
+        <p:nvSpPr>
+          <p:cNvPr id="3" name="TextBox 2">
+            <a:extLst>
+              <a:ext uri="{FF2B5EF4-FFF2-40B4-BE49-F238E27FC236}">
+                <a16:creationId xmlns:a16="http://schemas.microsoft.com/office/drawing/2014/main" id="{86FF2784-0908-EBEE-583E-0CB1DE770BFA}"/>
+              </a:ext>
+            </a:extLst>
+          </p:cNvPr>
+          <p:cNvSpPr txBox="1"/>
+          <p:nvPr/>
+        </p:nvSpPr>
+        <p:spPr>
+          <a:xfrm>
+            <a:off x="0" y="5157192"/>
+            <a:ext cx="12192000" cy="666786"/>
+          </a:xfrm>
+          <a:prstGeom prst="rect">
+            <a:avLst/>
+          </a:prstGeom>
+          <a:noFill/>
+        </p:spPr>
+        <p:txBody>
+          <a:bodyPr wrap="square" rtlCol="0">
+            <a:spAutoFit/>
+          </a:bodyPr>
+          <a:lstStyle/>
+          <a:p>
+            <a:pPr algn="ctr"/>
+            <a:r>
+              <a:rPr lang="en-US" sz="3733" b="1" dirty="0">
+                <a:solidFill>
+                  <a:srgbClr val="000066"/>
+                </a:solidFill>
+                <a:latin typeface="+mj-lt"/>
+                <a:ea typeface="Microsoft JhengHei" panose="020B0604030504040204" pitchFamily="34" charset="-120"/>
+              </a:rPr>
+              <a:t>( 2</a:t>
+            </a:r>
+            <a:r>
+              <a:rPr lang="zh-CN" altLang="en-US" sz="3733" b="1" dirty="0">
+                <a:solidFill>
+                  <a:srgbClr val="000066"/>
+                </a:solidFill>
+                <a:latin typeface="+mj-lt"/>
+                <a:ea typeface="Microsoft JhengHei" panose="020B0604030504040204" pitchFamily="34" charset="-120"/>
+              </a:rPr>
+              <a:t> </a:t>
+            </a:r>
+            <a:r>
+              <a:rPr lang="en-US" altLang="zh-CN" sz="3733" b="1" dirty="0">
+                <a:solidFill>
+                  <a:srgbClr val="000066"/>
+                </a:solidFill>
+                <a:latin typeface="+mj-lt"/>
+                <a:ea typeface="Microsoft JhengHei" panose="020B0604030504040204" pitchFamily="34" charset="-120"/>
+              </a:rPr>
+              <a:t>/</a:t>
+            </a:r>
+            <a:r>
+              <a:rPr lang="zh-CN" altLang="en-US" sz="3733" b="1" dirty="0">
+                <a:solidFill>
+                  <a:srgbClr val="000066"/>
+                </a:solidFill>
+                <a:latin typeface="+mj-lt"/>
+                <a:ea typeface="Microsoft JhengHei" panose="020B0604030504040204" pitchFamily="34" charset="-120"/>
+              </a:rPr>
+              <a:t> </a:t>
+            </a:r>
+            <a:r>
+              <a:rPr lang="en-US" altLang="zh-CN" sz="3733" b="1" dirty="0">
+                <a:solidFill>
+                  <a:srgbClr val="000066"/>
+                </a:solidFill>
+                <a:latin typeface="+mj-lt"/>
+                <a:ea typeface="Microsoft JhengHei" panose="020B0604030504040204" pitchFamily="34" charset="-120"/>
+              </a:rPr>
+              <a:t>6</a:t>
+            </a:r>
+            <a:r>
+              <a:rPr lang="en-US" sz="3733" b="1" dirty="0">
+                <a:solidFill>
+                  <a:srgbClr val="000066"/>
+                </a:solidFill>
+                <a:latin typeface="+mj-lt"/>
+                <a:ea typeface="Microsoft JhengHei" panose="020B0604030504040204" pitchFamily="34" charset="-120"/>
+              </a:rPr>
+              <a:t> )</a:t>
+            </a:r>
+            <a:endParaRPr lang="vi-VN" sz="3733" b="1" dirty="0">
               <a:solidFill>
                 <a:srgbClr val="000066"/>
               </a:solidFill>
-              <a:latin typeface="微軟正黑體" pitchFamily="34" charset="-120"/>
-              <a:ea typeface="微軟正黑體" pitchFamily="34" charset="-120"/>
+              <a:latin typeface="+mj-lt"/>
+              <a:ea typeface="Microsoft JhengHei" panose="020B0604030504040204" pitchFamily="34" charset="-120"/>
             </a:endParaRPr>
           </a:p>
-          <a:p>
-            <a:pPr algn="ctr">
-              <a:buNone/>
-            </a:pPr>
-            <a:r>
-              <a:rPr lang="zh-TW" altLang="en-US" sz="5400" b="1" dirty="0" smtClean="0">
-                <a:solidFill>
-                  <a:srgbClr val="000066"/>
-                </a:solidFill>
-                <a:latin typeface="微軟正黑體" pitchFamily="34" charset="-120"/>
-                <a:ea typeface="微軟正黑體" pitchFamily="34" charset="-120"/>
-              </a:rPr>
-              <a:t>我有平安在我心</a:t>
-            </a:r>
-            <a:endParaRPr lang="en-US" altLang="zh-TW" sz="5400" b="1" dirty="0" smtClean="0">
-              <a:solidFill>
-                <a:srgbClr val="000066"/>
-              </a:solidFill>
-              <a:latin typeface="微軟正黑體" pitchFamily="34" charset="-120"/>
-              <a:ea typeface="微軟正黑體" pitchFamily="34" charset="-120"/>
-            </a:endParaRPr>
-          </a:p>
-          <a:p>
-            <a:pPr algn="ctr">
-              <a:buNone/>
-            </a:pPr>
-            <a:r>
-              <a:rPr lang="zh-TW" altLang="en-US" sz="5400" b="1" dirty="0" smtClean="0">
-                <a:solidFill>
-                  <a:srgbClr val="000066"/>
-                </a:solidFill>
-                <a:latin typeface="微軟正黑體" pitchFamily="34" charset="-120"/>
-                <a:ea typeface="微軟正黑體" pitchFamily="34" charset="-120"/>
-              </a:rPr>
-              <a:t>主的平安無人能奪去</a:t>
-            </a:r>
-            <a:endParaRPr lang="zh-TW" altLang="en-US" sz="5400" b="1" dirty="0">
-              <a:solidFill>
-                <a:srgbClr val="000066"/>
-              </a:solidFill>
-              <a:latin typeface="微軟正黑體" pitchFamily="34" charset="-120"/>
-              <a:ea typeface="微軟正黑體" pitchFamily="34" charset="-120"/>
-            </a:endParaRPr>
-          </a:p>
         </p:txBody>
       </p:sp>
     </p:spTree>
+    <p:extLst>
+      <p:ext uri="{BB962C8B-B14F-4D97-AF65-F5344CB8AC3E}">
+        <p14:creationId xmlns:p14="http://schemas.microsoft.com/office/powerpoint/2010/main" val="940855533"/>
+      </p:ext>
+    </p:extLst>
   </p:cSld>
   <p:clrMapOvr>
     <a:masterClrMapping/>
@@ -3793,7 +4552,13 @@
   <p:cSld>
     <p:spTree>
       <p:nvGrpSpPr>
-        <p:cNvPr id="1" name=""/>
+        <p:cNvPr id="1" name="">
+          <a:extLst>
+            <a:ext uri="{FF2B5EF4-FFF2-40B4-BE49-F238E27FC236}">
+              <a16:creationId xmlns:a16="http://schemas.microsoft.com/office/drawing/2014/main" id="{7889ACDC-3E53-D159-578E-E54B7035D560}"/>
+            </a:ext>
+          </a:extLst>
+        </p:cNvPr>
         <p:cNvGrpSpPr/>
         <p:nvPr/>
       </p:nvGrpSpPr>
@@ -3807,30 +4572,46 @@
       </p:grpSpPr>
       <p:sp>
         <p:nvSpPr>
-          <p:cNvPr id="4" name="標題 3"/>
-          <p:cNvSpPr>
-            <a:spLocks noGrp="1"/>
-          </p:cNvSpPr>
-          <p:nvPr>
-            <p:ph type="title"/>
-          </p:nvPr>
-        </p:nvSpPr>
-        <p:spPr/>
-        <p:txBody>
-          <a:bodyPr/>
-          <a:lstStyle/>
-          <a:p>
-            <a:r>
-              <a:rPr lang="zh-TW" altLang="en-US" b="1" dirty="0" smtClean="0">
+          <p:cNvPr id="5" name="內容版面配置區 4">
+            <a:extLst>
+              <a:ext uri="{FF2B5EF4-FFF2-40B4-BE49-F238E27FC236}">
+                <a16:creationId xmlns:a16="http://schemas.microsoft.com/office/drawing/2014/main" id="{9D5A5E27-92FA-1E69-810F-43025A3E530F}"/>
+              </a:ext>
+            </a:extLst>
+          </p:cNvPr>
+          <p:cNvSpPr>
+            <a:spLocks noGrp="1"/>
+          </p:cNvSpPr>
+          <p:nvPr>
+            <p:ph idx="1"/>
+          </p:nvPr>
+        </p:nvSpPr>
+        <p:spPr>
+          <a:xfrm>
+            <a:off x="0" y="2084851"/>
+            <a:ext cx="12192000" cy="2404863"/>
+          </a:xfrm>
+        </p:spPr>
+        <p:txBody>
+          <a:bodyPr anchor="ctr">
+            <a:normAutofit/>
+          </a:bodyPr>
+          <a:lstStyle/>
+          <a:p>
+            <a:pPr algn="ctr">
+              <a:buNone/>
+            </a:pPr>
+            <a:r>
+              <a:rPr lang="zh-TW" altLang="en-US" sz="6400" b="1" dirty="0">
                 <a:solidFill>
                   <a:srgbClr val="000066"/>
                 </a:solidFill>
                 <a:latin typeface="微軟正黑體" pitchFamily="34" charset="-120"/>
                 <a:ea typeface="微軟正黑體" pitchFamily="34" charset="-120"/>
               </a:rPr>
-              <a:t>我有喜樂</a:t>
-            </a:r>
-            <a:endParaRPr lang="zh-TW" altLang="en-US" b="1" dirty="0">
+              <a:t>我有平安在我心</a:t>
+            </a:r>
+            <a:endParaRPr lang="en-US" altLang="zh-TW" sz="6400" b="1" dirty="0">
               <a:solidFill>
                 <a:srgbClr val="000066"/>
               </a:solidFill>
@@ -3838,108 +4619,128 @@
               <a:ea typeface="微軟正黑體" pitchFamily="34" charset="-120"/>
             </a:endParaRPr>
           </a:p>
-        </p:txBody>
-      </p:sp>
-      <p:sp>
-        <p:nvSpPr>
-          <p:cNvPr id="5" name="內容版面配置區 4"/>
-          <p:cNvSpPr>
-            <a:spLocks noGrp="1"/>
-          </p:cNvSpPr>
-          <p:nvPr>
-            <p:ph idx="1"/>
-          </p:nvPr>
-        </p:nvSpPr>
-        <p:spPr/>
-        <p:txBody>
-          <a:bodyPr>
-            <a:normAutofit/>
-          </a:bodyPr>
-          <a:lstStyle/>
           <a:p>
             <a:pPr algn="ctr">
               <a:buNone/>
             </a:pPr>
             <a:r>
-              <a:rPr lang="zh-TW" altLang="en-US" sz="5400" b="1" dirty="0" smtClean="0">
+              <a:rPr lang="zh-TW" altLang="en-US" sz="6400" b="1" dirty="0">
                 <a:solidFill>
                   <a:srgbClr val="000066"/>
                 </a:solidFill>
                 <a:latin typeface="微軟正黑體" pitchFamily="34" charset="-120"/>
                 <a:ea typeface="微軟正黑體" pitchFamily="34" charset="-120"/>
               </a:rPr>
-              <a:t>我要唱新歌  讚美耶穌</a:t>
-            </a:r>
-            <a:endParaRPr lang="en-US" altLang="zh-TW" sz="5400" b="1" dirty="0" smtClean="0">
+              <a:t>主的平安無人能奪去</a:t>
+            </a:r>
+          </a:p>
+        </p:txBody>
+      </p:sp>
+      <p:sp>
+        <p:nvSpPr>
+          <p:cNvPr id="3" name="TextBox 2">
+            <a:extLst>
+              <a:ext uri="{FF2B5EF4-FFF2-40B4-BE49-F238E27FC236}">
+                <a16:creationId xmlns:a16="http://schemas.microsoft.com/office/drawing/2014/main" id="{C7308B0C-2602-AE68-D475-FD3317880602}"/>
+              </a:ext>
+            </a:extLst>
+          </p:cNvPr>
+          <p:cNvSpPr txBox="1"/>
+          <p:nvPr/>
+        </p:nvSpPr>
+        <p:spPr>
+          <a:xfrm>
+            <a:off x="0" y="5157192"/>
+            <a:ext cx="12192000" cy="666786"/>
+          </a:xfrm>
+          <a:prstGeom prst="rect">
+            <a:avLst/>
+          </a:prstGeom>
+          <a:noFill/>
+        </p:spPr>
+        <p:txBody>
+          <a:bodyPr wrap="square" rtlCol="0">
+            <a:spAutoFit/>
+          </a:bodyPr>
+          <a:lstStyle/>
+          <a:p>
+            <a:pPr algn="ctr"/>
+            <a:r>
+              <a:rPr lang="en-US" sz="3733" b="1" dirty="0">
+                <a:solidFill>
+                  <a:srgbClr val="000066"/>
+                </a:solidFill>
+                <a:latin typeface="+mj-lt"/>
+                <a:ea typeface="Microsoft JhengHei" panose="020B0604030504040204" pitchFamily="34" charset="-120"/>
+              </a:rPr>
+              <a:t>( 2</a:t>
+            </a:r>
+            <a:r>
+              <a:rPr lang="zh-CN" altLang="en-US" sz="3733" b="1" dirty="0">
+                <a:solidFill>
+                  <a:srgbClr val="000066"/>
+                </a:solidFill>
+                <a:latin typeface="+mj-lt"/>
+                <a:ea typeface="Microsoft JhengHei" panose="020B0604030504040204" pitchFamily="34" charset="-120"/>
+              </a:rPr>
+              <a:t> </a:t>
+            </a:r>
+            <a:r>
+              <a:rPr lang="en-US" altLang="zh-CN" sz="3733" b="1" dirty="0">
+                <a:solidFill>
+                  <a:srgbClr val="000066"/>
+                </a:solidFill>
+                <a:latin typeface="+mj-lt"/>
+                <a:ea typeface="Microsoft JhengHei" panose="020B0604030504040204" pitchFamily="34" charset="-120"/>
+              </a:rPr>
+              <a:t>/</a:t>
+            </a:r>
+            <a:r>
+              <a:rPr lang="zh-CN" altLang="en-US" sz="3733" b="1" dirty="0">
+                <a:solidFill>
+                  <a:srgbClr val="000066"/>
+                </a:solidFill>
+                <a:latin typeface="+mj-lt"/>
+                <a:ea typeface="Microsoft JhengHei" panose="020B0604030504040204" pitchFamily="34" charset="-120"/>
+              </a:rPr>
+              <a:t> </a:t>
+            </a:r>
+            <a:r>
+              <a:rPr lang="en-US" altLang="zh-CN" sz="3733" b="1" dirty="0">
+                <a:solidFill>
+                  <a:srgbClr val="000066"/>
+                </a:solidFill>
+                <a:latin typeface="+mj-lt"/>
+                <a:ea typeface="Microsoft JhengHei" panose="020B0604030504040204" pitchFamily="34" charset="-120"/>
+              </a:rPr>
+              <a:t>6</a:t>
+            </a:r>
+            <a:r>
+              <a:rPr lang="en-US" sz="3733" b="1" dirty="0">
+                <a:solidFill>
+                  <a:srgbClr val="000066"/>
+                </a:solidFill>
+                <a:latin typeface="+mj-lt"/>
+                <a:ea typeface="Microsoft JhengHei" panose="020B0604030504040204" pitchFamily="34" charset="-120"/>
+              </a:rPr>
+              <a:t> )</a:t>
+            </a:r>
+            <a:endParaRPr lang="vi-VN" sz="3733" b="1" dirty="0">
               <a:solidFill>
                 <a:srgbClr val="000066"/>
               </a:solidFill>
-              <a:latin typeface="微軟正黑體" pitchFamily="34" charset="-120"/>
-              <a:ea typeface="微軟正黑體" pitchFamily="34" charset="-120"/>
+              <a:latin typeface="+mj-lt"/>
+              <a:ea typeface="Microsoft JhengHei" panose="020B0604030504040204" pitchFamily="34" charset="-120"/>
             </a:endParaRPr>
           </a:p>
-          <a:p>
-            <a:pPr algn="ctr">
-              <a:buNone/>
-            </a:pPr>
-            <a:r>
-              <a:rPr lang="zh-TW" altLang="en-US" sz="5400" b="1" dirty="0" smtClean="0">
-                <a:solidFill>
-                  <a:srgbClr val="000066"/>
-                </a:solidFill>
-                <a:latin typeface="微軟正黑體" pitchFamily="34" charset="-120"/>
-                <a:ea typeface="微軟正黑體" pitchFamily="34" charset="-120"/>
-              </a:rPr>
-              <a:t>唱新歌  讚美耶穌</a:t>
-            </a:r>
-            <a:endParaRPr lang="en-US" altLang="zh-TW" sz="5400" b="1" dirty="0" smtClean="0">
-              <a:solidFill>
-                <a:srgbClr val="000066"/>
-              </a:solidFill>
-              <a:latin typeface="微軟正黑體" pitchFamily="34" charset="-120"/>
-              <a:ea typeface="微軟正黑體" pitchFamily="34" charset="-120"/>
-            </a:endParaRPr>
-          </a:p>
-          <a:p>
-            <a:pPr algn="ctr">
-              <a:buNone/>
-            </a:pPr>
-            <a:r>
-              <a:rPr lang="zh-TW" altLang="en-US" sz="5400" b="1" dirty="0" smtClean="0">
-                <a:solidFill>
-                  <a:srgbClr val="000066"/>
-                </a:solidFill>
-                <a:latin typeface="微軟正黑體" pitchFamily="34" charset="-120"/>
-                <a:ea typeface="微軟正黑體" pitchFamily="34" charset="-120"/>
-              </a:rPr>
-              <a:t>唱新歌  讚美耶穌</a:t>
-            </a:r>
-            <a:endParaRPr lang="en-US" altLang="zh-TW" sz="5400" b="1" dirty="0" smtClean="0">
-              <a:solidFill>
-                <a:srgbClr val="000066"/>
-              </a:solidFill>
-              <a:latin typeface="微軟正黑體" pitchFamily="34" charset="-120"/>
-              <a:ea typeface="微軟正黑體" pitchFamily="34" charset="-120"/>
-            </a:endParaRPr>
-          </a:p>
-          <a:p>
-            <a:pPr algn="ctr">
-              <a:buNone/>
-            </a:pPr>
-            <a:r>
-              <a:rPr lang="zh-TW" altLang="en-US" sz="5400" b="1" dirty="0" smtClean="0">
-                <a:solidFill>
-                  <a:srgbClr val="000066"/>
-                </a:solidFill>
-                <a:latin typeface="微軟正黑體" pitchFamily="34" charset="-120"/>
-                <a:ea typeface="微軟正黑體" pitchFamily="34" charset="-120"/>
-              </a:rPr>
-              <a:t>主的喜樂無人能奪去</a:t>
-            </a:r>
-          </a:p>
         </p:txBody>
       </p:sp>
     </p:spTree>
+    <p:extLst>
+      <p:ext uri="{BB962C8B-B14F-4D97-AF65-F5344CB8AC3E}">
+        <p14:creationId xmlns:p14="http://schemas.microsoft.com/office/powerpoint/2010/main" val="2010419109"/>
+      </p:ext>
+    </p:extLst>
   </p:cSld>
   <p:clrMapOvr>
     <a:masterClrMapping/>
@@ -3952,7 +4753,13 @@
   <p:cSld>
     <p:spTree>
       <p:nvGrpSpPr>
-        <p:cNvPr id="1" name=""/>
+        <p:cNvPr id="1" name="">
+          <a:extLst>
+            <a:ext uri="{FF2B5EF4-FFF2-40B4-BE49-F238E27FC236}">
+              <a16:creationId xmlns:a16="http://schemas.microsoft.com/office/drawing/2014/main" id="{0F960AC5-E614-0065-29D2-09DE33BEF5B5}"/>
+            </a:ext>
+          </a:extLst>
+        </p:cNvPr>
         <p:cNvGrpSpPr/>
         <p:nvPr/>
       </p:nvGrpSpPr>
@@ -3966,30 +4773,46 @@
       </p:grpSpPr>
       <p:sp>
         <p:nvSpPr>
-          <p:cNvPr id="4" name="標題 3"/>
-          <p:cNvSpPr>
-            <a:spLocks noGrp="1"/>
-          </p:cNvSpPr>
-          <p:nvPr>
-            <p:ph type="title"/>
-          </p:nvPr>
-        </p:nvSpPr>
-        <p:spPr/>
-        <p:txBody>
-          <a:bodyPr/>
-          <a:lstStyle/>
-          <a:p>
-            <a:r>
-              <a:rPr lang="zh-TW" altLang="en-US" b="1" dirty="0" smtClean="0">
+          <p:cNvPr id="5" name="內容版面配置區 4">
+            <a:extLst>
+              <a:ext uri="{FF2B5EF4-FFF2-40B4-BE49-F238E27FC236}">
+                <a16:creationId xmlns:a16="http://schemas.microsoft.com/office/drawing/2014/main" id="{79CB1D97-EB2A-7DE3-B2A1-725BD98E4099}"/>
+              </a:ext>
+            </a:extLst>
+          </p:cNvPr>
+          <p:cNvSpPr>
+            <a:spLocks noGrp="1"/>
+          </p:cNvSpPr>
+          <p:nvPr>
+            <p:ph idx="1"/>
+          </p:nvPr>
+        </p:nvSpPr>
+        <p:spPr>
+          <a:xfrm>
+            <a:off x="0" y="2084851"/>
+            <a:ext cx="12192000" cy="2404863"/>
+          </a:xfrm>
+        </p:spPr>
+        <p:txBody>
+          <a:bodyPr anchor="ctr">
+            <a:normAutofit/>
+          </a:bodyPr>
+          <a:lstStyle/>
+          <a:p>
+            <a:pPr algn="ctr">
+              <a:buNone/>
+            </a:pPr>
+            <a:r>
+              <a:rPr lang="zh-TW" altLang="en-US" sz="6400" b="1" dirty="0">
                 <a:solidFill>
                   <a:srgbClr val="000066"/>
                 </a:solidFill>
                 <a:latin typeface="微軟正黑體" pitchFamily="34" charset="-120"/>
                 <a:ea typeface="微軟正黑體" pitchFamily="34" charset="-120"/>
               </a:rPr>
-              <a:t>我有喜樂</a:t>
-            </a:r>
-            <a:endParaRPr lang="zh-TW" altLang="en-US" b="1" dirty="0">
+              <a:t>我要唱新歌  讚美耶穌</a:t>
+            </a:r>
+            <a:endParaRPr lang="en-US" altLang="zh-TW" sz="6400" b="1" dirty="0">
               <a:solidFill>
                 <a:srgbClr val="000066"/>
               </a:solidFill>
@@ -3997,39 +4820,21 @@
               <a:ea typeface="微軟正黑體" pitchFamily="34" charset="-120"/>
             </a:endParaRPr>
           </a:p>
-        </p:txBody>
-      </p:sp>
-      <p:sp>
-        <p:nvSpPr>
-          <p:cNvPr id="5" name="內容版面配置區 4"/>
-          <p:cNvSpPr>
-            <a:spLocks noGrp="1"/>
-          </p:cNvSpPr>
-          <p:nvPr>
-            <p:ph idx="1"/>
-          </p:nvPr>
-        </p:nvSpPr>
-        <p:spPr/>
-        <p:txBody>
-          <a:bodyPr>
-            <a:normAutofit/>
-          </a:bodyPr>
-          <a:lstStyle/>
           <a:p>
             <a:pPr algn="ctr">
               <a:buNone/>
             </a:pPr>
             <a:r>
-              <a:rPr lang="zh-TW" altLang="en-US" sz="5400" b="1" dirty="0" smtClean="0">
+              <a:rPr lang="zh-TW" altLang="en-US" sz="6400" b="1" dirty="0">
                 <a:solidFill>
                   <a:srgbClr val="000066"/>
                 </a:solidFill>
                 <a:latin typeface="微軟正黑體" pitchFamily="34" charset="-120"/>
                 <a:ea typeface="微軟正黑體" pitchFamily="34" charset="-120"/>
               </a:rPr>
-              <a:t>我要向前跑  向主奔跑</a:t>
-            </a:r>
-            <a:endParaRPr lang="en-US" altLang="zh-TW" sz="5400" b="1" dirty="0" smtClean="0">
+              <a:t>唱新歌  讚美耶穌</a:t>
+            </a:r>
+            <a:endParaRPr lang="en-US" altLang="zh-TW" sz="6400" b="1" dirty="0">
               <a:solidFill>
                 <a:srgbClr val="000066"/>
               </a:solidFill>
@@ -4037,68 +4842,113 @@
               <a:ea typeface="微軟正黑體" pitchFamily="34" charset="-120"/>
             </a:endParaRPr>
           </a:p>
-          <a:p>
-            <a:pPr algn="ctr">
-              <a:buNone/>
-            </a:pPr>
-            <a:r>
-              <a:rPr lang="zh-TW" altLang="en-US" sz="5400" b="1" dirty="0" smtClean="0">
-                <a:solidFill>
-                  <a:srgbClr val="000066"/>
-                </a:solidFill>
-                <a:latin typeface="微軟正黑體" pitchFamily="34" charset="-120"/>
-                <a:ea typeface="微軟正黑體" pitchFamily="34" charset="-120"/>
-              </a:rPr>
-              <a:t>向前跑  向主奔跑</a:t>
-            </a:r>
-            <a:endParaRPr lang="en-US" altLang="zh-TW" sz="5400" b="1" dirty="0" smtClean="0">
+        </p:txBody>
+      </p:sp>
+      <p:sp>
+        <p:nvSpPr>
+          <p:cNvPr id="3" name="TextBox 2">
+            <a:extLst>
+              <a:ext uri="{FF2B5EF4-FFF2-40B4-BE49-F238E27FC236}">
+                <a16:creationId xmlns:a16="http://schemas.microsoft.com/office/drawing/2014/main" id="{C9740D8C-6F2C-DCAF-73C6-13DB6CF8F88F}"/>
+              </a:ext>
+            </a:extLst>
+          </p:cNvPr>
+          <p:cNvSpPr txBox="1"/>
+          <p:nvPr/>
+        </p:nvSpPr>
+        <p:spPr>
+          <a:xfrm>
+            <a:off x="0" y="5157192"/>
+            <a:ext cx="12192000" cy="666786"/>
+          </a:xfrm>
+          <a:prstGeom prst="rect">
+            <a:avLst/>
+          </a:prstGeom>
+          <a:noFill/>
+        </p:spPr>
+        <p:txBody>
+          <a:bodyPr wrap="square" rtlCol="0">
+            <a:spAutoFit/>
+          </a:bodyPr>
+          <a:lstStyle/>
+          <a:p>
+            <a:pPr algn="ctr"/>
+            <a:r>
+              <a:rPr lang="en-US" sz="3733" b="1" dirty="0">
+                <a:solidFill>
+                  <a:srgbClr val="000066"/>
+                </a:solidFill>
+                <a:latin typeface="+mj-lt"/>
+                <a:ea typeface="Microsoft JhengHei" panose="020B0604030504040204" pitchFamily="34" charset="-120"/>
+              </a:rPr>
+              <a:t>( 3</a:t>
+            </a:r>
+            <a:r>
+              <a:rPr lang="zh-CN" altLang="en-US" sz="3733" b="1" dirty="0">
+                <a:solidFill>
+                  <a:srgbClr val="000066"/>
+                </a:solidFill>
+                <a:latin typeface="+mj-lt"/>
+                <a:ea typeface="Microsoft JhengHei" panose="020B0604030504040204" pitchFamily="34" charset="-120"/>
+              </a:rPr>
+              <a:t> </a:t>
+            </a:r>
+            <a:r>
+              <a:rPr lang="en-US" altLang="zh-CN" sz="3733" b="1" dirty="0">
+                <a:solidFill>
+                  <a:srgbClr val="000066"/>
+                </a:solidFill>
+                <a:latin typeface="+mj-lt"/>
+                <a:ea typeface="Microsoft JhengHei" panose="020B0604030504040204" pitchFamily="34" charset="-120"/>
+              </a:rPr>
+              <a:t>/</a:t>
+            </a:r>
+            <a:r>
+              <a:rPr lang="zh-CN" altLang="en-US" sz="3733" b="1" dirty="0">
+                <a:solidFill>
+                  <a:srgbClr val="000066"/>
+                </a:solidFill>
+                <a:latin typeface="+mj-lt"/>
+                <a:ea typeface="Microsoft JhengHei" panose="020B0604030504040204" pitchFamily="34" charset="-120"/>
+              </a:rPr>
+              <a:t> </a:t>
+            </a:r>
+            <a:r>
+              <a:rPr lang="en-US" altLang="zh-CN" sz="3733" b="1" dirty="0">
+                <a:solidFill>
+                  <a:srgbClr val="000066"/>
+                </a:solidFill>
+                <a:latin typeface="+mj-lt"/>
+                <a:ea typeface="Microsoft JhengHei" panose="020B0604030504040204" pitchFamily="34" charset="-120"/>
+              </a:rPr>
+              <a:t>6</a:t>
+            </a:r>
+            <a:r>
+              <a:rPr lang="en-US" sz="3733" b="1" dirty="0">
+                <a:solidFill>
+                  <a:srgbClr val="000066"/>
+                </a:solidFill>
+                <a:latin typeface="+mj-lt"/>
+                <a:ea typeface="Microsoft JhengHei" panose="020B0604030504040204" pitchFamily="34" charset="-120"/>
+              </a:rPr>
+              <a:t> )</a:t>
+            </a:r>
+            <a:endParaRPr lang="vi-VN" sz="3733" b="1" dirty="0">
               <a:solidFill>
                 <a:srgbClr val="000066"/>
               </a:solidFill>
-              <a:latin typeface="微軟正黑體" pitchFamily="34" charset="-120"/>
-              <a:ea typeface="微軟正黑體" pitchFamily="34" charset="-120"/>
+              <a:latin typeface="+mj-lt"/>
+              <a:ea typeface="Microsoft JhengHei" panose="020B0604030504040204" pitchFamily="34" charset="-120"/>
             </a:endParaRPr>
           </a:p>
-          <a:p>
-            <a:pPr algn="ctr">
-              <a:buNone/>
-            </a:pPr>
-            <a:r>
-              <a:rPr lang="zh-TW" altLang="en-US" sz="5400" b="1" dirty="0" smtClean="0">
-                <a:solidFill>
-                  <a:srgbClr val="000066"/>
-                </a:solidFill>
-                <a:latin typeface="微軟正黑體" pitchFamily="34" charset="-120"/>
-                <a:ea typeface="微軟正黑體" pitchFamily="34" charset="-120"/>
-              </a:rPr>
-              <a:t>向前跑  向主奔跑</a:t>
-            </a:r>
-            <a:endParaRPr lang="en-US" altLang="zh-TW" sz="5400" b="1" dirty="0" smtClean="0">
-              <a:solidFill>
-                <a:srgbClr val="000066"/>
-              </a:solidFill>
-              <a:latin typeface="微軟正黑體" pitchFamily="34" charset="-120"/>
-              <a:ea typeface="微軟正黑體" pitchFamily="34" charset="-120"/>
-            </a:endParaRPr>
-          </a:p>
-          <a:p>
-            <a:pPr algn="ctr">
-              <a:buNone/>
-            </a:pPr>
-            <a:r>
-              <a:rPr lang="zh-TW" altLang="en-US" sz="5400" b="1" dirty="0" smtClean="0">
-                <a:solidFill>
-                  <a:srgbClr val="000066"/>
-                </a:solidFill>
-                <a:latin typeface="微軟正黑體" pitchFamily="34" charset="-120"/>
-                <a:ea typeface="微軟正黑體" pitchFamily="34" charset="-120"/>
-              </a:rPr>
-              <a:t>在基督裡我已得自由</a:t>
-            </a:r>
-          </a:p>
         </p:txBody>
       </p:sp>
     </p:spTree>
+    <p:extLst>
+      <p:ext uri="{BB962C8B-B14F-4D97-AF65-F5344CB8AC3E}">
+        <p14:creationId xmlns:p14="http://schemas.microsoft.com/office/powerpoint/2010/main" val="4236751857"/>
+      </p:ext>
+    </p:extLst>
   </p:cSld>
   <p:clrMapOvr>
     <a:masterClrMapping/>
@@ -4111,7 +4961,13 @@
   <p:cSld>
     <p:spTree>
       <p:nvGrpSpPr>
-        <p:cNvPr id="1" name=""/>
+        <p:cNvPr id="1" name="">
+          <a:extLst>
+            <a:ext uri="{FF2B5EF4-FFF2-40B4-BE49-F238E27FC236}">
+              <a16:creationId xmlns:a16="http://schemas.microsoft.com/office/drawing/2014/main" id="{E71742D2-0940-9101-625C-E162A15E2E0B}"/>
+            </a:ext>
+          </a:extLst>
+        </p:cNvPr>
         <p:cNvGrpSpPr/>
         <p:nvPr/>
       </p:nvGrpSpPr>
@@ -4125,30 +4981,46 @@
       </p:grpSpPr>
       <p:sp>
         <p:nvSpPr>
-          <p:cNvPr id="4" name="標題 3"/>
-          <p:cNvSpPr>
-            <a:spLocks noGrp="1"/>
-          </p:cNvSpPr>
-          <p:nvPr>
-            <p:ph type="title"/>
-          </p:nvPr>
-        </p:nvSpPr>
-        <p:spPr/>
-        <p:txBody>
-          <a:bodyPr/>
-          <a:lstStyle/>
-          <a:p>
-            <a:r>
-              <a:rPr lang="zh-TW" altLang="en-US" b="1" dirty="0" smtClean="0">
+          <p:cNvPr id="5" name="內容版面配置區 4">
+            <a:extLst>
+              <a:ext uri="{FF2B5EF4-FFF2-40B4-BE49-F238E27FC236}">
+                <a16:creationId xmlns:a16="http://schemas.microsoft.com/office/drawing/2014/main" id="{9388A9EF-0FE7-2C69-7710-617137201D82}"/>
+              </a:ext>
+            </a:extLst>
+          </p:cNvPr>
+          <p:cNvSpPr>
+            <a:spLocks noGrp="1"/>
+          </p:cNvSpPr>
+          <p:nvPr>
+            <p:ph idx="1"/>
+          </p:nvPr>
+        </p:nvSpPr>
+        <p:spPr>
+          <a:xfrm>
+            <a:off x="0" y="2084851"/>
+            <a:ext cx="12192000" cy="2404863"/>
+          </a:xfrm>
+        </p:spPr>
+        <p:txBody>
+          <a:bodyPr anchor="ctr">
+            <a:normAutofit/>
+          </a:bodyPr>
+          <a:lstStyle/>
+          <a:p>
+            <a:pPr algn="ctr">
+              <a:buNone/>
+            </a:pPr>
+            <a:r>
+              <a:rPr lang="zh-TW" altLang="en-US" sz="6400" b="1" dirty="0">
                 <a:solidFill>
                   <a:srgbClr val="000066"/>
                 </a:solidFill>
                 <a:latin typeface="微軟正黑體" pitchFamily="34" charset="-120"/>
                 <a:ea typeface="微軟正黑體" pitchFamily="34" charset="-120"/>
               </a:rPr>
-              <a:t>我有喜樂</a:t>
-            </a:r>
-            <a:endParaRPr lang="zh-TW" altLang="en-US" b="1" dirty="0">
+              <a:t>唱新歌  讚美耶穌</a:t>
+            </a:r>
+            <a:endParaRPr lang="en-US" altLang="zh-TW" sz="6400" b="1" dirty="0">
               <a:solidFill>
                 <a:srgbClr val="000066"/>
               </a:solidFill>
@@ -4156,108 +5028,128 @@
               <a:ea typeface="微軟正黑體" pitchFamily="34" charset="-120"/>
             </a:endParaRPr>
           </a:p>
-        </p:txBody>
-      </p:sp>
-      <p:sp>
-        <p:nvSpPr>
-          <p:cNvPr id="5" name="內容版面配置區 4"/>
-          <p:cNvSpPr>
-            <a:spLocks noGrp="1"/>
-          </p:cNvSpPr>
-          <p:nvPr>
-            <p:ph idx="1"/>
-          </p:nvPr>
-        </p:nvSpPr>
-        <p:spPr/>
-        <p:txBody>
-          <a:bodyPr>
-            <a:normAutofit/>
-          </a:bodyPr>
-          <a:lstStyle/>
           <a:p>
             <a:pPr algn="ctr">
               <a:buNone/>
             </a:pPr>
             <a:r>
-              <a:rPr lang="zh-TW" altLang="en-US" sz="5400" b="1" dirty="0" smtClean="0">
+              <a:rPr lang="zh-TW" altLang="en-US" sz="6400" b="1" dirty="0">
                 <a:solidFill>
                   <a:srgbClr val="000066"/>
                 </a:solidFill>
                 <a:latin typeface="微軟正黑體" pitchFamily="34" charset="-120"/>
                 <a:ea typeface="微軟正黑體" pitchFamily="34" charset="-120"/>
               </a:rPr>
-              <a:t>我要來跳舞  為主跳舞</a:t>
-            </a:r>
-            <a:endParaRPr lang="en-US" altLang="zh-TW" sz="5400" b="1" dirty="0" smtClean="0">
+              <a:t>主的喜樂無人能奪去</a:t>
+            </a:r>
+          </a:p>
+        </p:txBody>
+      </p:sp>
+      <p:sp>
+        <p:nvSpPr>
+          <p:cNvPr id="3" name="TextBox 2">
+            <a:extLst>
+              <a:ext uri="{FF2B5EF4-FFF2-40B4-BE49-F238E27FC236}">
+                <a16:creationId xmlns:a16="http://schemas.microsoft.com/office/drawing/2014/main" id="{859F0411-8DFC-FA6F-9DAD-2ADE0A98BBCC}"/>
+              </a:ext>
+            </a:extLst>
+          </p:cNvPr>
+          <p:cNvSpPr txBox="1"/>
+          <p:nvPr/>
+        </p:nvSpPr>
+        <p:spPr>
+          <a:xfrm>
+            <a:off x="0" y="5157192"/>
+            <a:ext cx="12192000" cy="666786"/>
+          </a:xfrm>
+          <a:prstGeom prst="rect">
+            <a:avLst/>
+          </a:prstGeom>
+          <a:noFill/>
+        </p:spPr>
+        <p:txBody>
+          <a:bodyPr wrap="square" rtlCol="0">
+            <a:spAutoFit/>
+          </a:bodyPr>
+          <a:lstStyle/>
+          <a:p>
+            <a:pPr algn="ctr"/>
+            <a:r>
+              <a:rPr lang="en-US" sz="3733" b="1" dirty="0">
+                <a:solidFill>
+                  <a:srgbClr val="000066"/>
+                </a:solidFill>
+                <a:latin typeface="+mj-lt"/>
+                <a:ea typeface="Microsoft JhengHei" panose="020B0604030504040204" pitchFamily="34" charset="-120"/>
+              </a:rPr>
+              <a:t>( 3</a:t>
+            </a:r>
+            <a:r>
+              <a:rPr lang="zh-CN" altLang="en-US" sz="3733" b="1" dirty="0">
+                <a:solidFill>
+                  <a:srgbClr val="000066"/>
+                </a:solidFill>
+                <a:latin typeface="+mj-lt"/>
+                <a:ea typeface="Microsoft JhengHei" panose="020B0604030504040204" pitchFamily="34" charset="-120"/>
+              </a:rPr>
+              <a:t> </a:t>
+            </a:r>
+            <a:r>
+              <a:rPr lang="en-US" altLang="zh-CN" sz="3733" b="1" dirty="0">
+                <a:solidFill>
+                  <a:srgbClr val="000066"/>
+                </a:solidFill>
+                <a:latin typeface="+mj-lt"/>
+                <a:ea typeface="Microsoft JhengHei" panose="020B0604030504040204" pitchFamily="34" charset="-120"/>
+              </a:rPr>
+              <a:t>/</a:t>
+            </a:r>
+            <a:r>
+              <a:rPr lang="zh-CN" altLang="en-US" sz="3733" b="1" dirty="0">
+                <a:solidFill>
+                  <a:srgbClr val="000066"/>
+                </a:solidFill>
+                <a:latin typeface="+mj-lt"/>
+                <a:ea typeface="Microsoft JhengHei" panose="020B0604030504040204" pitchFamily="34" charset="-120"/>
+              </a:rPr>
+              <a:t> </a:t>
+            </a:r>
+            <a:r>
+              <a:rPr lang="en-US" altLang="zh-CN" sz="3733" b="1" dirty="0">
+                <a:solidFill>
+                  <a:srgbClr val="000066"/>
+                </a:solidFill>
+                <a:latin typeface="+mj-lt"/>
+                <a:ea typeface="Microsoft JhengHei" panose="020B0604030504040204" pitchFamily="34" charset="-120"/>
+              </a:rPr>
+              <a:t>6</a:t>
+            </a:r>
+            <a:r>
+              <a:rPr lang="en-US" sz="3733" b="1" dirty="0">
+                <a:solidFill>
+                  <a:srgbClr val="000066"/>
+                </a:solidFill>
+                <a:latin typeface="+mj-lt"/>
+                <a:ea typeface="Microsoft JhengHei" panose="020B0604030504040204" pitchFamily="34" charset="-120"/>
+              </a:rPr>
+              <a:t> )</a:t>
+            </a:r>
+            <a:endParaRPr lang="vi-VN" sz="3733" b="1" dirty="0">
               <a:solidFill>
                 <a:srgbClr val="000066"/>
               </a:solidFill>
-              <a:latin typeface="微軟正黑體" pitchFamily="34" charset="-120"/>
-              <a:ea typeface="微軟正黑體" pitchFamily="34" charset="-120"/>
+              <a:latin typeface="+mj-lt"/>
+              <a:ea typeface="Microsoft JhengHei" panose="020B0604030504040204" pitchFamily="34" charset="-120"/>
             </a:endParaRPr>
           </a:p>
-          <a:p>
-            <a:pPr algn="ctr">
-              <a:buNone/>
-            </a:pPr>
-            <a:r>
-              <a:rPr lang="zh-TW" altLang="en-US" sz="5400" b="1" dirty="0" smtClean="0">
-                <a:solidFill>
-                  <a:srgbClr val="000066"/>
-                </a:solidFill>
-                <a:latin typeface="微軟正黑體" pitchFamily="34" charset="-120"/>
-                <a:ea typeface="微軟正黑體" pitchFamily="34" charset="-120"/>
-              </a:rPr>
-              <a:t>來跳舞  為主跳舞</a:t>
-            </a:r>
-            <a:endParaRPr lang="en-US" altLang="zh-TW" sz="5400" b="1" dirty="0" smtClean="0">
-              <a:solidFill>
-                <a:srgbClr val="000066"/>
-              </a:solidFill>
-              <a:latin typeface="微軟正黑體" pitchFamily="34" charset="-120"/>
-              <a:ea typeface="微軟正黑體" pitchFamily="34" charset="-120"/>
-            </a:endParaRPr>
-          </a:p>
-          <a:p>
-            <a:pPr algn="ctr">
-              <a:buNone/>
-            </a:pPr>
-            <a:r>
-              <a:rPr lang="zh-TW" altLang="en-US" sz="5400" b="1" dirty="0" smtClean="0">
-                <a:solidFill>
-                  <a:srgbClr val="000066"/>
-                </a:solidFill>
-                <a:latin typeface="微軟正黑體" pitchFamily="34" charset="-120"/>
-                <a:ea typeface="微軟正黑體" pitchFamily="34" charset="-120"/>
-              </a:rPr>
-              <a:t>來跳舞  為主跳舞</a:t>
-            </a:r>
-            <a:endParaRPr lang="en-US" altLang="zh-TW" sz="5400" b="1" dirty="0" smtClean="0">
-              <a:solidFill>
-                <a:srgbClr val="000066"/>
-              </a:solidFill>
-              <a:latin typeface="微軟正黑體" pitchFamily="34" charset="-120"/>
-              <a:ea typeface="微軟正黑體" pitchFamily="34" charset="-120"/>
-            </a:endParaRPr>
-          </a:p>
-          <a:p>
-            <a:pPr algn="ctr">
-              <a:buNone/>
-            </a:pPr>
-            <a:r>
-              <a:rPr lang="zh-TW" altLang="en-US" sz="5400" b="1" dirty="0" smtClean="0">
-                <a:solidFill>
-                  <a:srgbClr val="000066"/>
-                </a:solidFill>
-                <a:latin typeface="微軟正黑體" pitchFamily="34" charset="-120"/>
-                <a:ea typeface="微軟正黑體" pitchFamily="34" charset="-120"/>
-              </a:rPr>
-              <a:t>主的喜樂無人能奪去</a:t>
-            </a:r>
-          </a:p>
         </p:txBody>
       </p:sp>
     </p:spTree>
+    <p:extLst>
+      <p:ext uri="{BB962C8B-B14F-4D97-AF65-F5344CB8AC3E}">
+        <p14:creationId xmlns:p14="http://schemas.microsoft.com/office/powerpoint/2010/main" val="713427903"/>
+      </p:ext>
+    </p:extLst>
   </p:cSld>
   <p:clrMapOvr>
     <a:masterClrMapping/>
@@ -4270,7 +5162,13 @@
   <p:cSld>
     <p:spTree>
       <p:nvGrpSpPr>
-        <p:cNvPr id="1" name=""/>
+        <p:cNvPr id="1" name="">
+          <a:extLst>
+            <a:ext uri="{FF2B5EF4-FFF2-40B4-BE49-F238E27FC236}">
+              <a16:creationId xmlns:a16="http://schemas.microsoft.com/office/drawing/2014/main" id="{1D299C19-88BC-5100-BDFC-791BC7A71594}"/>
+            </a:ext>
+          </a:extLst>
+        </p:cNvPr>
         <p:cNvGrpSpPr/>
         <p:nvPr/>
       </p:nvGrpSpPr>
@@ -4284,30 +5182,46 @@
       </p:grpSpPr>
       <p:sp>
         <p:nvSpPr>
-          <p:cNvPr id="4" name="標題 3"/>
-          <p:cNvSpPr>
-            <a:spLocks noGrp="1"/>
-          </p:cNvSpPr>
-          <p:nvPr>
-            <p:ph type="title"/>
-          </p:nvPr>
-        </p:nvSpPr>
-        <p:spPr/>
-        <p:txBody>
-          <a:bodyPr/>
-          <a:lstStyle/>
-          <a:p>
-            <a:r>
-              <a:rPr lang="zh-TW" altLang="en-US" b="1" dirty="0" smtClean="0">
+          <p:cNvPr id="5" name="內容版面配置區 4">
+            <a:extLst>
+              <a:ext uri="{FF2B5EF4-FFF2-40B4-BE49-F238E27FC236}">
+                <a16:creationId xmlns:a16="http://schemas.microsoft.com/office/drawing/2014/main" id="{7C8DA726-50BB-6CED-4A03-83DF211DDDF1}"/>
+              </a:ext>
+            </a:extLst>
+          </p:cNvPr>
+          <p:cNvSpPr>
+            <a:spLocks noGrp="1"/>
+          </p:cNvSpPr>
+          <p:nvPr>
+            <p:ph idx="1"/>
+          </p:nvPr>
+        </p:nvSpPr>
+        <p:spPr>
+          <a:xfrm>
+            <a:off x="0" y="2084851"/>
+            <a:ext cx="12192000" cy="2404863"/>
+          </a:xfrm>
+        </p:spPr>
+        <p:txBody>
+          <a:bodyPr anchor="ctr">
+            <a:normAutofit/>
+          </a:bodyPr>
+          <a:lstStyle/>
+          <a:p>
+            <a:pPr algn="ctr">
+              <a:buNone/>
+            </a:pPr>
+            <a:r>
+              <a:rPr lang="zh-TW" altLang="en-US" sz="6400" b="1" dirty="0">
                 <a:solidFill>
                   <a:srgbClr val="000066"/>
                 </a:solidFill>
                 <a:latin typeface="微軟正黑體" pitchFamily="34" charset="-120"/>
                 <a:ea typeface="微軟正黑體" pitchFamily="34" charset="-120"/>
               </a:rPr>
-              <a:t>我有喜樂</a:t>
-            </a:r>
-            <a:endParaRPr lang="zh-TW" altLang="en-US" b="1" dirty="0">
+              <a:t>我要向前跑  向主奔跑</a:t>
+            </a:r>
+            <a:endParaRPr lang="en-US" altLang="zh-TW" sz="6400" b="1" dirty="0">
               <a:solidFill>
                 <a:srgbClr val="000066"/>
               </a:solidFill>
@@ -4315,39 +5229,21 @@
               <a:ea typeface="微軟正黑體" pitchFamily="34" charset="-120"/>
             </a:endParaRPr>
           </a:p>
-        </p:txBody>
-      </p:sp>
-      <p:sp>
-        <p:nvSpPr>
-          <p:cNvPr id="5" name="內容版面配置區 4"/>
-          <p:cNvSpPr>
-            <a:spLocks noGrp="1"/>
-          </p:cNvSpPr>
-          <p:nvPr>
-            <p:ph idx="1"/>
-          </p:nvPr>
-        </p:nvSpPr>
-        <p:spPr/>
-        <p:txBody>
-          <a:bodyPr>
-            <a:normAutofit/>
-          </a:bodyPr>
-          <a:lstStyle/>
           <a:p>
             <a:pPr algn="ctr">
               <a:buNone/>
             </a:pPr>
             <a:r>
-              <a:rPr lang="zh-TW" altLang="en-US" sz="5400" b="1" dirty="0" smtClean="0">
+              <a:rPr lang="zh-TW" altLang="en-US" sz="6400" b="1" dirty="0">
                 <a:solidFill>
                   <a:srgbClr val="000066"/>
                 </a:solidFill>
                 <a:latin typeface="微軟正黑體" pitchFamily="34" charset="-120"/>
                 <a:ea typeface="微軟正黑體" pitchFamily="34" charset="-120"/>
               </a:rPr>
-              <a:t>我要來歡呼  大聲歡呼</a:t>
-            </a:r>
-            <a:endParaRPr lang="en-US" altLang="zh-TW" sz="5400" b="1" dirty="0" smtClean="0">
+              <a:t>向前跑  向主奔跑</a:t>
+            </a:r>
+            <a:endParaRPr lang="en-US" altLang="zh-TW" sz="6400" b="1" dirty="0">
               <a:solidFill>
                 <a:srgbClr val="000066"/>
               </a:solidFill>
@@ -4355,21 +5251,185 @@
               <a:ea typeface="微軟正黑體" pitchFamily="34" charset="-120"/>
             </a:endParaRPr>
           </a:p>
+        </p:txBody>
+      </p:sp>
+      <p:sp>
+        <p:nvSpPr>
+          <p:cNvPr id="3" name="TextBox 2">
+            <a:extLst>
+              <a:ext uri="{FF2B5EF4-FFF2-40B4-BE49-F238E27FC236}">
+                <a16:creationId xmlns:a16="http://schemas.microsoft.com/office/drawing/2014/main" id="{15D73893-57D6-6667-C29A-1B344EE1E7C8}"/>
+              </a:ext>
+            </a:extLst>
+          </p:cNvPr>
+          <p:cNvSpPr txBox="1"/>
+          <p:nvPr/>
+        </p:nvSpPr>
+        <p:spPr>
+          <a:xfrm>
+            <a:off x="0" y="5157192"/>
+            <a:ext cx="12192000" cy="666786"/>
+          </a:xfrm>
+          <a:prstGeom prst="rect">
+            <a:avLst/>
+          </a:prstGeom>
+          <a:noFill/>
+        </p:spPr>
+        <p:txBody>
+          <a:bodyPr wrap="square" rtlCol="0">
+            <a:spAutoFit/>
+          </a:bodyPr>
+          <a:lstStyle/>
+          <a:p>
+            <a:pPr algn="ctr"/>
+            <a:r>
+              <a:rPr lang="en-US" sz="3733" b="1" dirty="0">
+                <a:solidFill>
+                  <a:srgbClr val="000066"/>
+                </a:solidFill>
+                <a:latin typeface="+mj-lt"/>
+                <a:ea typeface="Microsoft JhengHei" panose="020B0604030504040204" pitchFamily="34" charset="-120"/>
+              </a:rPr>
+              <a:t>( 4</a:t>
+            </a:r>
+            <a:r>
+              <a:rPr lang="zh-CN" altLang="en-US" sz="3733" b="1" dirty="0">
+                <a:solidFill>
+                  <a:srgbClr val="000066"/>
+                </a:solidFill>
+                <a:latin typeface="+mj-lt"/>
+                <a:ea typeface="Microsoft JhengHei" panose="020B0604030504040204" pitchFamily="34" charset="-120"/>
+              </a:rPr>
+              <a:t> </a:t>
+            </a:r>
+            <a:r>
+              <a:rPr lang="en-US" altLang="zh-CN" sz="3733" b="1" dirty="0">
+                <a:solidFill>
+                  <a:srgbClr val="000066"/>
+                </a:solidFill>
+                <a:latin typeface="+mj-lt"/>
+                <a:ea typeface="Microsoft JhengHei" panose="020B0604030504040204" pitchFamily="34" charset="-120"/>
+              </a:rPr>
+              <a:t>/</a:t>
+            </a:r>
+            <a:r>
+              <a:rPr lang="zh-CN" altLang="en-US" sz="3733" b="1" dirty="0">
+                <a:solidFill>
+                  <a:srgbClr val="000066"/>
+                </a:solidFill>
+                <a:latin typeface="+mj-lt"/>
+                <a:ea typeface="Microsoft JhengHei" panose="020B0604030504040204" pitchFamily="34" charset="-120"/>
+              </a:rPr>
+              <a:t> </a:t>
+            </a:r>
+            <a:r>
+              <a:rPr lang="en-US" altLang="zh-CN" sz="3733" b="1" dirty="0">
+                <a:solidFill>
+                  <a:srgbClr val="000066"/>
+                </a:solidFill>
+                <a:latin typeface="+mj-lt"/>
+                <a:ea typeface="Microsoft JhengHei" panose="020B0604030504040204" pitchFamily="34" charset="-120"/>
+              </a:rPr>
+              <a:t>6</a:t>
+            </a:r>
+            <a:r>
+              <a:rPr lang="en-US" sz="3733" b="1" dirty="0">
+                <a:solidFill>
+                  <a:srgbClr val="000066"/>
+                </a:solidFill>
+                <a:latin typeface="+mj-lt"/>
+                <a:ea typeface="Microsoft JhengHei" panose="020B0604030504040204" pitchFamily="34" charset="-120"/>
+              </a:rPr>
+              <a:t> )</a:t>
+            </a:r>
+            <a:endParaRPr lang="vi-VN" sz="3733" b="1" dirty="0">
+              <a:solidFill>
+                <a:srgbClr val="000066"/>
+              </a:solidFill>
+              <a:latin typeface="+mj-lt"/>
+              <a:ea typeface="Microsoft JhengHei" panose="020B0604030504040204" pitchFamily="34" charset="-120"/>
+            </a:endParaRPr>
+          </a:p>
+        </p:txBody>
+      </p:sp>
+    </p:spTree>
+    <p:extLst>
+      <p:ext uri="{BB962C8B-B14F-4D97-AF65-F5344CB8AC3E}">
+        <p14:creationId xmlns:p14="http://schemas.microsoft.com/office/powerpoint/2010/main" val="2033479774"/>
+      </p:ext>
+    </p:extLst>
+  </p:cSld>
+  <p:clrMapOvr>
+    <a:masterClrMapping/>
+  </p:clrMapOvr>
+</p:sld>
+</file>
+
+<file path=ppt/slides/slide9.xml><?xml version="1.0" encoding="utf-8"?>
+<p:sld xmlns:a="http://schemas.openxmlformats.org/drawingml/2006/main" xmlns:r="http://schemas.openxmlformats.org/officeDocument/2006/relationships" xmlns:p="http://schemas.openxmlformats.org/presentationml/2006/main">
+  <p:cSld>
+    <p:spTree>
+      <p:nvGrpSpPr>
+        <p:cNvPr id="1" name="">
+          <a:extLst>
+            <a:ext uri="{FF2B5EF4-FFF2-40B4-BE49-F238E27FC236}">
+              <a16:creationId xmlns:a16="http://schemas.microsoft.com/office/drawing/2014/main" id="{286D6686-1C3A-3F7D-E6FC-1916101D3653}"/>
+            </a:ext>
+          </a:extLst>
+        </p:cNvPr>
+        <p:cNvGrpSpPr/>
+        <p:nvPr/>
+      </p:nvGrpSpPr>
+      <p:grpSpPr>
+        <a:xfrm>
+          <a:off x="0" y="0"/>
+          <a:ext cx="0" cy="0"/>
+          <a:chOff x="0" y="0"/>
+          <a:chExt cx="0" cy="0"/>
+        </a:xfrm>
+      </p:grpSpPr>
+      <p:sp>
+        <p:nvSpPr>
+          <p:cNvPr id="5" name="內容版面配置區 4">
+            <a:extLst>
+              <a:ext uri="{FF2B5EF4-FFF2-40B4-BE49-F238E27FC236}">
+                <a16:creationId xmlns:a16="http://schemas.microsoft.com/office/drawing/2014/main" id="{439AF3AF-A214-9B5D-BA0A-A108E4D12422}"/>
+              </a:ext>
+            </a:extLst>
+          </p:cNvPr>
+          <p:cNvSpPr>
+            <a:spLocks noGrp="1"/>
+          </p:cNvSpPr>
+          <p:nvPr>
+            <p:ph idx="1"/>
+          </p:nvPr>
+        </p:nvSpPr>
+        <p:spPr>
+          <a:xfrm>
+            <a:off x="0" y="2084851"/>
+            <a:ext cx="12192000" cy="2404863"/>
+          </a:xfrm>
+        </p:spPr>
+        <p:txBody>
+          <a:bodyPr anchor="ctr">
+            <a:normAutofit/>
+          </a:bodyPr>
+          <a:lstStyle/>
           <a:p>
             <a:pPr algn="ctr">
               <a:buNone/>
             </a:pPr>
             <a:r>
-              <a:rPr lang="zh-TW" altLang="en-US" sz="5400" b="1" dirty="0" smtClean="0">
+              <a:rPr lang="zh-TW" altLang="en-US" sz="6400" b="1" dirty="0">
                 <a:solidFill>
                   <a:srgbClr val="000066"/>
                 </a:solidFill>
                 <a:latin typeface="微軟正黑體" pitchFamily="34" charset="-120"/>
                 <a:ea typeface="微軟正黑體" pitchFamily="34" charset="-120"/>
               </a:rPr>
-              <a:t>來歡呼  大聲歡呼</a:t>
-            </a:r>
-            <a:endParaRPr lang="en-US" altLang="zh-TW" sz="5400" b="1" dirty="0" smtClean="0">
+              <a:t>向前跑  向主奔跑</a:t>
+            </a:r>
+            <a:endParaRPr lang="en-US" altLang="zh-TW" sz="6400" b="1" dirty="0">
               <a:solidFill>
                 <a:srgbClr val="000066"/>
               </a:solidFill>
@@ -4382,41 +5442,123 @@
               <a:buNone/>
             </a:pPr>
             <a:r>
-              <a:rPr lang="zh-TW" altLang="en-US" sz="5400" b="1" dirty="0" smtClean="0">
+              <a:rPr lang="zh-TW" altLang="en-US" sz="6400" b="1" dirty="0">
                 <a:solidFill>
                   <a:srgbClr val="000066"/>
                 </a:solidFill>
                 <a:latin typeface="微軟正黑體" pitchFamily="34" charset="-120"/>
                 <a:ea typeface="微軟正黑體" pitchFamily="34" charset="-120"/>
               </a:rPr>
-              <a:t>來歡呼  大聲歡呼</a:t>
-            </a:r>
-            <a:endParaRPr lang="en-US" altLang="zh-TW" sz="5400" b="1" dirty="0" smtClean="0">
+              <a:t>在基督裡我已得自由</a:t>
+            </a:r>
+          </a:p>
+        </p:txBody>
+      </p:sp>
+      <p:sp>
+        <p:nvSpPr>
+          <p:cNvPr id="3" name="TextBox 2">
+            <a:extLst>
+              <a:ext uri="{FF2B5EF4-FFF2-40B4-BE49-F238E27FC236}">
+                <a16:creationId xmlns:a16="http://schemas.microsoft.com/office/drawing/2014/main" id="{067F6EF4-64BD-303D-C4EF-F7ACD71801B3}"/>
+              </a:ext>
+            </a:extLst>
+          </p:cNvPr>
+          <p:cNvSpPr txBox="1"/>
+          <p:nvPr/>
+        </p:nvSpPr>
+        <p:spPr>
+          <a:xfrm>
+            <a:off x="0" y="5157192"/>
+            <a:ext cx="12192000" cy="666786"/>
+          </a:xfrm>
+          <a:prstGeom prst="rect">
+            <a:avLst/>
+          </a:prstGeom>
+          <a:noFill/>
+        </p:spPr>
+        <p:txBody>
+          <a:bodyPr wrap="square" rtlCol="0">
+            <a:spAutoFit/>
+          </a:bodyPr>
+          <a:lstStyle/>
+          <a:p>
+            <a:pPr algn="ctr"/>
+            <a:r>
+              <a:rPr lang="en-US" sz="3733" b="1" dirty="0">
+                <a:solidFill>
+                  <a:srgbClr val="000066"/>
+                </a:solidFill>
+                <a:latin typeface="+mj-lt"/>
+                <a:ea typeface="Microsoft JhengHei" panose="020B0604030504040204" pitchFamily="34" charset="-120"/>
+              </a:rPr>
+              <a:t>( 4</a:t>
+            </a:r>
+            <a:r>
+              <a:rPr lang="zh-CN" altLang="en-US" sz="3733" b="1" dirty="0">
+                <a:solidFill>
+                  <a:srgbClr val="000066"/>
+                </a:solidFill>
+                <a:latin typeface="+mj-lt"/>
+                <a:ea typeface="Microsoft JhengHei" panose="020B0604030504040204" pitchFamily="34" charset="-120"/>
+              </a:rPr>
+              <a:t> </a:t>
+            </a:r>
+            <a:r>
+              <a:rPr lang="en-US" altLang="zh-CN" sz="3733" b="1" dirty="0">
+                <a:solidFill>
+                  <a:srgbClr val="000066"/>
+                </a:solidFill>
+                <a:latin typeface="+mj-lt"/>
+                <a:ea typeface="Microsoft JhengHei" panose="020B0604030504040204" pitchFamily="34" charset="-120"/>
+              </a:rPr>
+              <a:t>/</a:t>
+            </a:r>
+            <a:r>
+              <a:rPr lang="zh-CN" altLang="en-US" sz="3733" b="1" dirty="0">
+                <a:solidFill>
+                  <a:srgbClr val="000066"/>
+                </a:solidFill>
+                <a:latin typeface="+mj-lt"/>
+                <a:ea typeface="Microsoft JhengHei" panose="020B0604030504040204" pitchFamily="34" charset="-120"/>
+              </a:rPr>
+              <a:t> </a:t>
+            </a:r>
+            <a:r>
+              <a:rPr lang="en-US" altLang="zh-CN" sz="3733" b="1" dirty="0">
+                <a:solidFill>
+                  <a:srgbClr val="000066"/>
+                </a:solidFill>
+                <a:latin typeface="+mj-lt"/>
+                <a:ea typeface="Microsoft JhengHei" panose="020B0604030504040204" pitchFamily="34" charset="-120"/>
+              </a:rPr>
+              <a:t>6</a:t>
+            </a:r>
+            <a:r>
+              <a:rPr lang="en-US" sz="3733" b="1" dirty="0">
+                <a:solidFill>
+                  <a:srgbClr val="000066"/>
+                </a:solidFill>
+                <a:latin typeface="+mj-lt"/>
+                <a:ea typeface="Microsoft JhengHei" panose="020B0604030504040204" pitchFamily="34" charset="-120"/>
+              </a:rPr>
+              <a:t> )</a:t>
+            </a:r>
+            <a:endParaRPr lang="vi-VN" sz="3733" b="1" dirty="0">
               <a:solidFill>
                 <a:srgbClr val="000066"/>
               </a:solidFill>
-              <a:latin typeface="微軟正黑體" pitchFamily="34" charset="-120"/>
-              <a:ea typeface="微軟正黑體" pitchFamily="34" charset="-120"/>
+              <a:latin typeface="+mj-lt"/>
+              <a:ea typeface="Microsoft JhengHei" panose="020B0604030504040204" pitchFamily="34" charset="-120"/>
             </a:endParaRPr>
           </a:p>
-          <a:p>
-            <a:pPr algn="ctr">
-              <a:buNone/>
-            </a:pPr>
-            <a:r>
-              <a:rPr lang="zh-TW" altLang="en-US" sz="5400" b="1" dirty="0" smtClean="0">
-                <a:solidFill>
-                  <a:srgbClr val="000066"/>
-                </a:solidFill>
-                <a:latin typeface="微軟正黑體" pitchFamily="34" charset="-120"/>
-                <a:ea typeface="微軟正黑體" pitchFamily="34" charset="-120"/>
-              </a:rPr>
-              <a:t>在基督裡我已得自由</a:t>
-            </a:r>
-          </a:p>
         </p:txBody>
       </p:sp>
     </p:spTree>
+    <p:extLst>
+      <p:ext uri="{BB962C8B-B14F-4D97-AF65-F5344CB8AC3E}">
+        <p14:creationId xmlns:p14="http://schemas.microsoft.com/office/powerpoint/2010/main" val="1454567435"/>
+      </p:ext>
+    </p:extLst>
   </p:cSld>
   <p:clrMapOvr>
     <a:masterClrMapping/>
